--- a/lecons/F2T/19_S13_L4_P4_Temperate_Problems_Adaptations.pptx
+++ b/lecons/F2T/19_S13_L4_P4_Temperate_Problems_Adaptations.pptx
@@ -56,9 +56,12 @@
     <p:sldId id="304" r:id="rId50"/>
     <p:sldId id="305" r:id="rId51"/>
     <p:sldId id="306" r:id="rId52"/>
+    <p:sldId id="307" r:id="rId53"/>
+    <p:sldId id="308" r:id="rId54"/>
+    <p:sldId id="309" r:id="rId55"/>
   </p:sldIdLst>
   <p:notesMasterIdLst>
-    <p:notesMasterId r:id="rId53"/>
+    <p:notesMasterId r:id="rId56"/>
   </p:notesMasterIdLst>
   <p:sldSz cx="12192000" cy="6858000"/>
   <p:notesSz cx="6858000" cy="12192000"/>
@@ -640,7 +643,7 @@
           <a:p>
             <a:r>
               <a:rPr lang="en-US" dirty="0"/>
-              <a:t>Listen carefully to this situation from real life. In January, heavy snow falls on a village in Canada. The roads are blocked, the water pipes freeze and the farmer cannot take his cows out. Think about it, because I am going to ask you some questions.</a:t>
+              <a:t>Listen carefully to this situation from real life. In January, heavy snow falls on a village in Canada. The roads are blocked, the water pipes freeze and the farmer cannot take his cows out. The farmer asks: "How can we live and farm with such a hard winter?" Think about it, because I am going to ask you some questions.</a:t>
             </a:r>
             <a:endParaRPr lang="en-US" dirty="0"/>
           </a:p>
@@ -816,7 +819,7 @@
           <a:p>
             <a:r>
               <a:rPr lang="en-US" dirty="0"/>
-              <a:t>Good. The snow blocks the roads and freezes the water pipes.</a:t>
+              <a:t>Good. The farmer faces the problems of winter and must adapt.</a:t>
             </a:r>
             <a:endParaRPr lang="en-US" dirty="0"/>
           </a:p>
@@ -904,7 +907,7 @@
           <a:p>
             <a:r>
               <a:rPr lang="en-US" dirty="0"/>
-              <a:t>Question 2: Why can the cows not go out? Think for a moment, then raise your hand to answer.</a:t>
+              <a:t>Question 2: What blocks the roads? Think for a moment, then raise your hand to answer.</a:t>
             </a:r>
             <a:endParaRPr lang="en-US" dirty="0"/>
           </a:p>
@@ -992,7 +995,7 @@
           <a:p>
             <a:r>
               <a:rPr lang="en-US" dirty="0"/>
-              <a:t>Good. The grass is under the snow.</a:t>
+              <a:t>Good. Snow.</a:t>
             </a:r>
             <a:endParaRPr lang="en-US" dirty="0"/>
           </a:p>
@@ -1080,7 +1083,7 @@
           <a:p>
             <a:r>
               <a:rPr lang="en-US" dirty="0"/>
-              <a:t>Question 3: What can the farmer give them? Think for a moment, then raise your hand to answer.</a:t>
+              <a:t>Question 3: What happens to the water pipes? Think for a moment, then raise your hand to answer.</a:t>
             </a:r>
             <a:endParaRPr lang="en-US" dirty="0"/>
           </a:p>
@@ -1168,7 +1171,7 @@
           <a:p>
             <a:r>
               <a:rPr lang="en-US" dirty="0"/>
-              <a:t>Good. Hay that he stored in summer.</a:t>
+              <a:t>Good. They freeze.</a:t>
             </a:r>
             <a:endParaRPr lang="en-US" dirty="0"/>
           </a:p>
@@ -1432,7 +1435,7 @@
           <a:p>
             <a:r>
               <a:rPr lang="en-US" dirty="0"/>
-              <a:t>Activity 1. Look carefully at this picture: a machine clears the snow from a road. Observe every detail before I ask the question.</a:t>
+              <a:t>Activity 1. Look carefully at this picture: a machine on a snowy road. Observe every detail before I ask the question.</a:t>
             </a:r>
             <a:endParaRPr lang="en-US" dirty="0"/>
           </a:p>
@@ -1608,7 +1611,7 @@
           <a:p>
             <a:r>
               <a:rPr lang="en-US" dirty="0"/>
-              <a:t>Here is the question for Activity 1: What problem does snow cause? How do people solve it? Take one minute to think and write your answer in your rough notebook.</a:t>
+              <a:t>Here is the question for Activity 1: How do people clear roads blocked by snow? Take one minute to think and write your answer in your rough notebook.</a:t>
             </a:r>
             <a:endParaRPr lang="en-US" dirty="0"/>
           </a:p>
@@ -1696,7 +1699,7 @@
           <a:p>
             <a:r>
               <a:rPr lang="en-US" dirty="0"/>
-              <a:t>Let us check the answer together. It blocks the roads. Machines clear the snow.</a:t>
+              <a:t>Let us check the answer together. With machines (snowploughs).</a:t>
             </a:r>
             <a:endParaRPr lang="en-US" dirty="0"/>
           </a:p>
@@ -1784,7 +1787,7 @@
           <a:p>
             <a:r>
               <a:rPr lang="en-US" dirty="0"/>
-              <a:t>Activity 2. Look carefully at this picture: a dust storm on a farm in the USA in the 1930s. Observe every detail before I ask the question.</a:t>
+              <a:t>Activity 2. Look carefully at this picture: a dust storm on farms. Observe every detail before I ask the question.</a:t>
             </a:r>
             <a:endParaRPr lang="en-US" dirty="0"/>
           </a:p>
@@ -1872,7 +1875,7 @@
           <a:p>
             <a:r>
               <a:rPr lang="en-US" dirty="0"/>
-              <a:t>Here is the question for Activity 2: The wind blew away the dry soil of the farms. What was this disaster called? Take one minute to think and write your answer in your rough notebook.</a:t>
+              <a:t>Here is the question for Activity 2: What did the wind do to the dry soil of these farms? Take one minute to think and write your answer in your rough notebook.</a:t>
             </a:r>
             <a:endParaRPr lang="en-US" dirty="0"/>
           </a:p>
@@ -1960,7 +1963,7 @@
           <a:p>
             <a:r>
               <a:rPr lang="en-US" dirty="0"/>
-              <a:t>Let us check the answer together. The Dust Bowl.</a:t>
+              <a:t>Let us check the answer together. It blew it away.</a:t>
             </a:r>
             <a:endParaRPr lang="en-US" dirty="0"/>
           </a:p>
@@ -2048,7 +2051,7 @@
           <a:p>
             <a:r>
               <a:rPr lang="en-US" dirty="0"/>
-              <a:t>Activity 3. Look carefully at this picture: a forest fire in Greece in summer. Observe every detail before I ask the question.</a:t>
+              <a:t>Activity 3. Look carefully at this picture: a forest fire. Observe every detail before I ask the question.</a:t>
             </a:r>
             <a:endParaRPr lang="en-US" dirty="0"/>
           </a:p>
@@ -2136,7 +2139,7 @@
           <a:p>
             <a:r>
               <a:rPr lang="en-US" dirty="0"/>
-              <a:t>Here is the question for Activity 3: Why are there forest fires around the Mediterranean in summer? Take one minute to think and write your answer in your rough notebook.</a:t>
+              <a:t>Here is the question for Activity 3: Why are there forest fires in Mediterranean summers? Take one minute to think and write your answer in your rough notebook.</a:t>
             </a:r>
             <a:endParaRPr lang="en-US" dirty="0"/>
           </a:p>
@@ -2224,7 +2227,7 @@
           <a:p>
             <a:r>
               <a:rPr lang="en-US" dirty="0"/>
-              <a:t>Let us check the answer together. The summer is hot and dry, so plants burn easily.</a:t>
+              <a:t>Let us check the answer together. Summers are hot and dry, so plants burn easily.</a:t>
             </a:r>
             <a:endParaRPr lang="en-US" dirty="0"/>
           </a:p>
@@ -2312,7 +2315,7 @@
           <a:p>
             <a:r>
               <a:rPr lang="en-US" dirty="0"/>
-              <a:t>Activity 4. Look carefully at this picture: vegetables grow inside a glass house. Observe every detail before I ask the question.</a:t>
+              <a:t>Activity 4. Look carefully at this picture: a greenhouse. Observe every detail before I ask the question.</a:t>
             </a:r>
             <a:endParaRPr lang="en-US" dirty="0"/>
           </a:p>
@@ -2576,7 +2579,7 @@
           <a:p>
             <a:r>
               <a:rPr lang="en-US" dirty="0"/>
-              <a:t>Let us check the answer together. They grow them in greenhouses, where it is warm.</a:t>
+              <a:t>Let us check the answer together. In greenhouses, where it is warm.</a:t>
             </a:r>
             <a:endParaRPr lang="en-US" dirty="0"/>
           </a:p>
@@ -2840,7 +2843,7 @@
           <a:p>
             <a:r>
               <a:rPr lang="en-US" dirty="0"/>
-              <a:t>Let us check the answer together. The trees stop the wind, so the soil is not blown away.</a:t>
+              <a:t>Let us check the answer together. To stop the wind from blowing the soil away.</a:t>
             </a:r>
             <a:endParaRPr lang="en-US" dirty="0"/>
           </a:p>
@@ -3016,7 +3019,7 @@
           <a:p>
             <a:r>
               <a:rPr lang="en-US" dirty="0"/>
-              <a:t>Let us copy the definitions. The key terms of this lesson are defined as follows. On this slide we have Greenhouse and Shelterbelt. Write each point on a new line, with the key term first, and explain it in your own words when we revise.</a:t>
+              <a:t>Let us copy the definitions. The key terms of this lesson are defined as follows. On this slide we have Greenhouse and Shelter belt. Write each point on a new line, with the key term first, and explain it in your own words when we revise.</a:t>
             </a:r>
             <a:endParaRPr lang="en-US" dirty="0"/>
           </a:p>
@@ -3104,7 +3107,7 @@
           <a:p>
             <a:r>
               <a:rPr lang="en-US" dirty="0"/>
-              <a:t>Let us copy Problems Faced. People in the temperate region face the following problems. On this slide we have Cold winters and Short growing season. Write each point on a new line, with the key term first, and explain it in your own words when we revise. When you finish, we go to the next slide.</a:t>
+              <a:t>Let us copy Problems Faced. People in the temperate region face the following problems. Copy the point on Cold winters on the left, then draw the diagram on the right: clearing snow. Give it a title and label it clearly.</a:t>
             </a:r>
             <a:endParaRPr lang="en-US" dirty="0"/>
           </a:p>
@@ -3192,7 +3195,7 @@
           <a:p>
             <a:r>
               <a:rPr lang="en-US" dirty="0"/>
-              <a:t>We continue with Problems Faced. On this slide we have Soil erosion, Forest fires and Pollution. Write each point on a new line, with the key term first, and explain it in your own words when we revise.</a:t>
+              <a:t>We continue with Problems Faced. On this slide we have Short growing season and Soil erosion by wind. Write each point on a new line, with the key term first, and explain it in your own words when we revise.</a:t>
             </a:r>
             <a:endParaRPr lang="en-US" dirty="0"/>
           </a:p>
@@ -3280,7 +3283,7 @@
           <a:p>
             <a:r>
               <a:rPr lang="en-US" dirty="0"/>
-              <a:t>Let us copy Adaptations. People adapt in the following ways. On this slide we have Houses and clothes and Transport. Write each point on a new line, with the key term first, and explain it in your own words when we revise. When you finish, we go to the next slide.</a:t>
+              <a:t>Copy the point on Summer droughts and fires on the left, then draw the diagram on the right: a forest fire. Give it a title and label it clearly.</a:t>
             </a:r>
             <a:endParaRPr lang="en-US" dirty="0"/>
           </a:p>
@@ -3368,7 +3371,7 @@
           <a:p>
             <a:r>
               <a:rPr lang="en-US" dirty="0"/>
-              <a:t>We continue with Adaptations. On this slide we have Farming and Soil protection. Write each point on a new line, with the key term first, and explain it in your own words when we revise.</a:t>
+              <a:t>Let us copy Adaptations. People adapt in the following ways. On this slide we have Houses and Clothes. Write each point on a new line, with the key term first, and explain it in your own words when we revise. When you finish, we go to the next slide.</a:t>
             </a:r>
             <a:endParaRPr lang="en-US" dirty="0"/>
           </a:p>
@@ -3544,7 +3547,7 @@
           <a:p>
             <a:r>
               <a:rPr lang="en-US" dirty="0"/>
-              <a:t>Now let us check what you have understood. Question 1: Give two problems of the temperate region. Answer in your exercise book.</a:t>
+              <a:t>We continue with Adaptations. On this slide we have Transport. Write each point on a new line, with the key term first, and explain it in your own words when we revise.</a:t>
             </a:r>
             <a:endParaRPr lang="en-US" dirty="0"/>
           </a:p>
@@ -3632,7 +3635,7 @@
           <a:p>
             <a:r>
               <a:rPr lang="en-US" dirty="0"/>
-              <a:t>The expected answer is: cold winters with snow; soil erosion by wind. If you got it right, well done.</a:t>
+              <a:t>Copy the point on Greenhouses on the left, then draw the diagram on the right: a greenhouse. Give it a title and label it clearly.</a:t>
             </a:r>
             <a:endParaRPr lang="en-US" dirty="0"/>
           </a:p>
@@ -3720,7 +3723,7 @@
           <a:p>
             <a:r>
               <a:rPr lang="en-US" dirty="0"/>
-              <a:t>Now let us check what you have understood. Question 2: How can farmers grow vegetables in winter? Answer in your exercise book.</a:t>
+              <a:t>Copy the point on Shelter belts and irrigation on the left, then draw the diagram on the right: a shelter belt. Give it a title and label it clearly.</a:t>
             </a:r>
             <a:endParaRPr lang="en-US" dirty="0"/>
           </a:p>
@@ -3808,7 +3811,7 @@
           <a:p>
             <a:r>
               <a:rPr lang="en-US" dirty="0"/>
-              <a:t>The expected answer is: in greenhouses. If you got it right, well done.</a:t>
+              <a:t>Now let us check what you have understood. Question 1: Give two problems of the temperate region. Answer in your exercise book.</a:t>
             </a:r>
             <a:endParaRPr lang="en-US" dirty="0"/>
           </a:p>
@@ -3896,7 +3899,7 @@
           <a:p>
             <a:r>
               <a:rPr lang="en-US" dirty="0"/>
-              <a:t>For those who need more practice, fill in the blanks in your exercise book. The answers are: number 1, greenhouse; number 2, shelterbelt; number 3, Bowl.</a:t>
+              <a:t>The expected answer is: cold winters with snow; soil erosion by wind. If you got it right, well done.</a:t>
             </a:r>
             <a:endParaRPr lang="en-US" dirty="0"/>
           </a:p>
@@ -3984,7 +3987,7 @@
           <a:p>
             <a:r>
               <a:rPr lang="en-US" dirty="0"/>
-              <a:t>For your homework: List five jobs done by people in your family or neighbourhood (for example farmer, trader, teacher, mechanic, tailor). We shall correct it at the beginning of our next lesson.</a:t>
+              <a:t>Now let us check what you have understood. Question 2: How can farmers grow vegetables in winter? Answer in your exercise book.</a:t>
             </a:r>
             <a:endParaRPr lang="en-US" dirty="0"/>
           </a:p>
@@ -4072,7 +4075,7 @@
           <a:p>
             <a:r>
               <a:rPr lang="en-US" dirty="0"/>
-              <a:t>Our next lesson will be on Lesson 5 (Part 1): The Sectors of the Economy: Introduction, Definitions and Key Concepts. Thank you for your attention, and see you next time.</a:t>
+              <a:t>The expected answer is: in greenhouses. If you got it right, well done.</a:t>
             </a:r>
             <a:endParaRPr lang="en-US" dirty="0"/>
           </a:p>
@@ -4160,7 +4163,7 @@
           <a:p>
             <a:r>
               <a:rPr lang="en-US" dirty="0"/>
-              <a:t>Let us play the bilingual game. I say a word in English, and you give me the French word. Then we do the reverse.</a:t>
+              <a:t>For those who need more practice, fill in the blanks in your exercise book. The answers are: number 1, greenhouse; number 2, shelterbelt; number 3, Bowl.</a:t>
             </a:r>
             <a:endParaRPr lang="en-US" dirty="0"/>
           </a:p>
@@ -4248,7 +4251,7 @@
           <a:p>
             <a:r>
               <a:rPr lang="en-US" dirty="0"/>
-              <a:t>I record this information in the official logbook of the class after the lesson.</a:t>
+              <a:t>For your homework: List five jobs done by people in your family or neighbourhood (for example farmer, trader, teacher, mechanic, tailor). We shall correct it at the beginning of our next lesson.</a:t>
             </a:r>
             <a:endParaRPr lang="en-US" dirty="0"/>
           </a:p>
@@ -4336,7 +4339,7 @@
           <a:p>
             <a:r>
               <a:rPr lang="en-US" dirty="0"/>
-              <a:t>I complete the second page of the logbook: the matter taught, the evaluation, the homework and the attendance.</a:t>
+              <a:t>Our next lesson will be on Lesson 5 (Part 1): The Sectors of the Economy: Introduction, Definitions and Key Concepts. Thank you for your attention, and see you next time.</a:t>
             </a:r>
             <a:endParaRPr lang="en-US" dirty="0"/>
           </a:p>
@@ -4512,7 +4515,7 @@
           <a:p>
             <a:r>
               <a:rPr lang="en-US" dirty="0"/>
-              <a:t>This slide is for me, the teacher: it gives the timing of the lesson and what to do if the projector is not available.</a:t>
+              <a:t>Let us play the bilingual game. I say a word in English, and you give me the French word. Then we do the reverse.</a:t>
             </a:r>
             <a:endParaRPr lang="en-US" dirty="0"/>
           </a:p>
@@ -4600,7 +4603,7 @@
           <a:p>
             <a:r>
               <a:rPr lang="en-US" dirty="0"/>
-              <a:t>These are the references and picture credits used to prepare this lesson.</a:t>
+              <a:t>I record this information in the official logbook of the class after the lesson.</a:t>
             </a:r>
             <a:endParaRPr lang="en-US" dirty="0"/>
           </a:p>
@@ -4624,6 +4627,270 @@
             <a:fld id="{F7021451-1387-4CA6-816F-3879F97B5CBC}" type="slidenum">
               <a:rPr lang="en-US"/>
               <a:t>51</a:t>
+            </a:fld>
+            <a:endParaRPr lang="en-US"/>
+          </a:p>
+        </p:txBody>
+      </p:sp>
+    </p:spTree>
+    <p:extLst>
+      <p:ext uri="{BB962C8B-B14F-4D97-AF65-F5344CB8AC3E}">
+        <p14:creationId xmlns:p14="http://schemas.microsoft.com/office/powerpoint/2010/main" val="1024086991"/>
+      </p:ext>
+    </p:extLst>
+  </p:cSld>
+  <p:clrMapOvr>
+    <a:masterClrMapping/>
+  </p:clrMapOvr>
+</p:notes>
+</file>
+
+<file path=ppt/notesSlides/notesSlide52.xml><?xml version="1.0" encoding="utf-8"?>
+<p:notes xmlns:a="http://schemas.openxmlformats.org/drawingml/2006/main" xmlns:r="http://schemas.openxmlformats.org/officeDocument/2006/relationships" xmlns:p="http://schemas.openxmlformats.org/presentationml/2006/main">
+  <p:cSld>
+    <p:spTree>
+      <p:nvGrpSpPr>
+        <p:cNvPr id="1" name=""/>
+        <p:cNvGrpSpPr/>
+        <p:nvPr/>
+      </p:nvGrpSpPr>
+      <p:grpSpPr>
+        <a:xfrm>
+          <a:off x="0" y="0"/>
+          <a:ext cx="0" cy="0"/>
+          <a:chOff x="0" y="0"/>
+          <a:chExt cx="0" cy="0"/>
+        </a:xfrm>
+      </p:grpSpPr>
+      <p:sp>
+        <p:nvSpPr>
+          <p:cNvPr id="2" name="Slide Image Placeholder 1"/>
+          <p:cNvSpPr>
+            <a:spLocks noGrp="1" noRot="1" noChangeAspect="1"/>
+          </p:cNvSpPr>
+          <p:nvPr>
+            <p:ph type="sldImg"/>
+          </p:nvPr>
+        </p:nvSpPr>
+        <p:spPr/>
+      </p:sp>
+      <p:sp>
+        <p:nvSpPr>
+          <p:cNvPr id="3" name="Notes Placeholder 2"/>
+          <p:cNvSpPr>
+            <a:spLocks noGrp="1"/>
+          </p:cNvSpPr>
+          <p:nvPr>
+            <p:ph type="body" idx="1"/>
+          </p:nvPr>
+        </p:nvSpPr>
+        <p:spPr/>
+        <p:txBody>
+          <a:bodyPr/>
+          <a:lstStyle/>
+          <a:p>
+            <a:r>
+              <a:rPr lang="en-US" dirty="0"/>
+              <a:t>I complete the second page of the logbook: the matter taught, the evaluation, the homework and the attendance.</a:t>
+            </a:r>
+            <a:endParaRPr lang="en-US" dirty="0"/>
+          </a:p>
+        </p:txBody>
+      </p:sp>
+      <p:sp>
+        <p:nvSpPr>
+          <p:cNvPr id="4" name="Slide Number Placeholder 3"/>
+          <p:cNvSpPr>
+            <a:spLocks noGrp="1"/>
+          </p:cNvSpPr>
+          <p:nvPr>
+            <p:ph type="sldNum" sz="quarter" idx="10"/>
+          </p:nvPr>
+        </p:nvSpPr>
+        <p:spPr/>
+        <p:txBody>
+          <a:bodyPr/>
+          <a:lstStyle/>
+          <a:p>
+            <a:fld id="{F7021451-1387-4CA6-816F-3879F97B5CBC}" type="slidenum">
+              <a:rPr lang="en-US"/>
+              <a:t>52</a:t>
+            </a:fld>
+            <a:endParaRPr lang="en-US"/>
+          </a:p>
+        </p:txBody>
+      </p:sp>
+    </p:spTree>
+    <p:extLst>
+      <p:ext uri="{BB962C8B-B14F-4D97-AF65-F5344CB8AC3E}">
+        <p14:creationId xmlns:p14="http://schemas.microsoft.com/office/powerpoint/2010/main" val="1024086991"/>
+      </p:ext>
+    </p:extLst>
+  </p:cSld>
+  <p:clrMapOvr>
+    <a:masterClrMapping/>
+  </p:clrMapOvr>
+</p:notes>
+</file>
+
+<file path=ppt/notesSlides/notesSlide53.xml><?xml version="1.0" encoding="utf-8"?>
+<p:notes xmlns:a="http://schemas.openxmlformats.org/drawingml/2006/main" xmlns:r="http://schemas.openxmlformats.org/officeDocument/2006/relationships" xmlns:p="http://schemas.openxmlformats.org/presentationml/2006/main">
+  <p:cSld>
+    <p:spTree>
+      <p:nvGrpSpPr>
+        <p:cNvPr id="1" name=""/>
+        <p:cNvGrpSpPr/>
+        <p:nvPr/>
+      </p:nvGrpSpPr>
+      <p:grpSpPr>
+        <a:xfrm>
+          <a:off x="0" y="0"/>
+          <a:ext cx="0" cy="0"/>
+          <a:chOff x="0" y="0"/>
+          <a:chExt cx="0" cy="0"/>
+        </a:xfrm>
+      </p:grpSpPr>
+      <p:sp>
+        <p:nvSpPr>
+          <p:cNvPr id="2" name="Slide Image Placeholder 1"/>
+          <p:cNvSpPr>
+            <a:spLocks noGrp="1" noRot="1" noChangeAspect="1"/>
+          </p:cNvSpPr>
+          <p:nvPr>
+            <p:ph type="sldImg"/>
+          </p:nvPr>
+        </p:nvSpPr>
+        <p:spPr/>
+      </p:sp>
+      <p:sp>
+        <p:nvSpPr>
+          <p:cNvPr id="3" name="Notes Placeholder 2"/>
+          <p:cNvSpPr>
+            <a:spLocks noGrp="1"/>
+          </p:cNvSpPr>
+          <p:nvPr>
+            <p:ph type="body" idx="1"/>
+          </p:nvPr>
+        </p:nvSpPr>
+        <p:spPr/>
+        <p:txBody>
+          <a:bodyPr/>
+          <a:lstStyle/>
+          <a:p>
+            <a:r>
+              <a:rPr lang="en-US" dirty="0"/>
+              <a:t>This slide is for me, the teacher: it gives the timing of the lesson and what to do if the projector is not available.</a:t>
+            </a:r>
+            <a:endParaRPr lang="en-US" dirty="0"/>
+          </a:p>
+        </p:txBody>
+      </p:sp>
+      <p:sp>
+        <p:nvSpPr>
+          <p:cNvPr id="4" name="Slide Number Placeholder 3"/>
+          <p:cNvSpPr>
+            <a:spLocks noGrp="1"/>
+          </p:cNvSpPr>
+          <p:nvPr>
+            <p:ph type="sldNum" sz="quarter" idx="10"/>
+          </p:nvPr>
+        </p:nvSpPr>
+        <p:spPr/>
+        <p:txBody>
+          <a:bodyPr/>
+          <a:lstStyle/>
+          <a:p>
+            <a:fld id="{F7021451-1387-4CA6-816F-3879F97B5CBC}" type="slidenum">
+              <a:rPr lang="en-US"/>
+              <a:t>53</a:t>
+            </a:fld>
+            <a:endParaRPr lang="en-US"/>
+          </a:p>
+        </p:txBody>
+      </p:sp>
+    </p:spTree>
+    <p:extLst>
+      <p:ext uri="{BB962C8B-B14F-4D97-AF65-F5344CB8AC3E}">
+        <p14:creationId xmlns:p14="http://schemas.microsoft.com/office/powerpoint/2010/main" val="1024086991"/>
+      </p:ext>
+    </p:extLst>
+  </p:cSld>
+  <p:clrMapOvr>
+    <a:masterClrMapping/>
+  </p:clrMapOvr>
+</p:notes>
+</file>
+
+<file path=ppt/notesSlides/notesSlide54.xml><?xml version="1.0" encoding="utf-8"?>
+<p:notes xmlns:a="http://schemas.openxmlformats.org/drawingml/2006/main" xmlns:r="http://schemas.openxmlformats.org/officeDocument/2006/relationships" xmlns:p="http://schemas.openxmlformats.org/presentationml/2006/main">
+  <p:cSld>
+    <p:spTree>
+      <p:nvGrpSpPr>
+        <p:cNvPr id="1" name=""/>
+        <p:cNvGrpSpPr/>
+        <p:nvPr/>
+      </p:nvGrpSpPr>
+      <p:grpSpPr>
+        <a:xfrm>
+          <a:off x="0" y="0"/>
+          <a:ext cx="0" cy="0"/>
+          <a:chOff x="0" y="0"/>
+          <a:chExt cx="0" cy="0"/>
+        </a:xfrm>
+      </p:grpSpPr>
+      <p:sp>
+        <p:nvSpPr>
+          <p:cNvPr id="2" name="Slide Image Placeholder 1"/>
+          <p:cNvSpPr>
+            <a:spLocks noGrp="1" noRot="1" noChangeAspect="1"/>
+          </p:cNvSpPr>
+          <p:nvPr>
+            <p:ph type="sldImg"/>
+          </p:nvPr>
+        </p:nvSpPr>
+        <p:spPr/>
+      </p:sp>
+      <p:sp>
+        <p:nvSpPr>
+          <p:cNvPr id="3" name="Notes Placeholder 2"/>
+          <p:cNvSpPr>
+            <a:spLocks noGrp="1"/>
+          </p:cNvSpPr>
+          <p:nvPr>
+            <p:ph type="body" idx="1"/>
+          </p:nvPr>
+        </p:nvSpPr>
+        <p:spPr/>
+        <p:txBody>
+          <a:bodyPr/>
+          <a:lstStyle/>
+          <a:p>
+            <a:r>
+              <a:rPr lang="en-US" dirty="0"/>
+              <a:t>These are the references and picture credits used to prepare this lesson.</a:t>
+            </a:r>
+            <a:endParaRPr lang="en-US" dirty="0"/>
+          </a:p>
+        </p:txBody>
+      </p:sp>
+      <p:sp>
+        <p:nvSpPr>
+          <p:cNvPr id="4" name="Slide Number Placeholder 3"/>
+          <p:cNvSpPr>
+            <a:spLocks noGrp="1"/>
+          </p:cNvSpPr>
+          <p:nvPr>
+            <p:ph type="sldNum" sz="quarter" idx="10"/>
+          </p:nvPr>
+        </p:nvSpPr>
+        <p:spPr/>
+        <p:txBody>
+          <a:bodyPr/>
+          <a:lstStyle/>
+          <a:p>
+            <a:fld id="{F7021451-1387-4CA6-816F-3879F97B5CBC}" type="slidenum">
+              <a:rPr lang="en-US"/>
+              <a:t>54</a:t>
             </a:fld>
             <a:endParaRPr lang="en-US"/>
           </a:p>
@@ -6332,7 +6599,7 @@
         <p:spPr>
           <a:xfrm>
             <a:off x="0" y="658368"/>
-            <a:ext cx="5120640" cy="5833872"/>
+            <a:ext cx="3840480" cy="5833872"/>
           </a:xfrm>
           <a:prstGeom prst="rect">
             <a:avLst/>
@@ -6347,8 +6614,8 @@
         </p:nvSpPr>
         <p:spPr>
           <a:xfrm>
-            <a:off x="5349240" y="1005840"/>
-            <a:ext cx="6522415" cy="731520"/>
+            <a:off x="4069080" y="1005840"/>
+            <a:ext cx="7802575" cy="731520"/>
           </a:xfrm>
           <a:prstGeom prst="rect">
             <a:avLst/>
@@ -6388,8 +6655,8 @@
         </p:nvSpPr>
         <p:spPr>
           <a:xfrm>
-            <a:off x="5349240" y="1783080"/>
-            <a:ext cx="6522415" cy="4663440"/>
+            <a:off x="4069080" y="1783080"/>
+            <a:ext cx="7802575" cy="4663440"/>
           </a:xfrm>
           <a:prstGeom prst="rect">
             <a:avLst/>
@@ -6416,7 +6683,7 @@
                 <a:ea typeface="Times New Roman" pitchFamily="34" charset="-122"/>
                 <a:cs typeface="Times New Roman" pitchFamily="34" charset="-120"/>
               </a:rPr>
-              <a:t>In January, heavy snow falls on a village in Canada. The roads are blocked, the water pipes freeze and the farmer cannot take his cows out.</a:t>
+              <a:t>In January, heavy snow falls on a village in Canada. The roads are blocked, the water pipes freeze and the farmer cannot take his cows out. The farmer asks: "How can we live and farm with such a hard winter?"</a:t>
             </a:r>
             <a:endParaRPr lang="en-US" sz="4000" dirty="0"/>
           </a:p>
@@ -6854,7 +7121,7 @@
                 <a:ea typeface="Times New Roman" pitchFamily="34" charset="-122"/>
                 <a:cs typeface="Times New Roman" pitchFamily="34" charset="-120"/>
               </a:rPr>
-              <a:t>The snow blocks the roads and freezes the water pipes.</a:t>
+              <a:t>The farmer faces the problems of winter and must adapt.</a:t>
             </a:r>
             <a:endParaRPr lang="en-US" sz="4000" dirty="0"/>
           </a:p>
@@ -7073,7 +7340,7 @@
                 <a:ea typeface="Times New Roman" pitchFamily="34" charset="-122"/>
                 <a:cs typeface="Times New Roman" pitchFamily="34" charset="-120"/>
               </a:rPr>
-              <a:t>Why can the cows not go out?</a:t>
+              <a:t>What blocks the roads?</a:t>
             </a:r>
             <a:endParaRPr lang="en-US" sz="4000" dirty="0"/>
           </a:p>
@@ -7292,7 +7559,7 @@
                 <a:ea typeface="Times New Roman" pitchFamily="34" charset="-122"/>
                 <a:cs typeface="Times New Roman" pitchFamily="34" charset="-120"/>
               </a:rPr>
-              <a:t>The grass is under the snow.</a:t>
+              <a:t>Snow.</a:t>
             </a:r>
             <a:endParaRPr lang="en-US" sz="4000" dirty="0"/>
           </a:p>
@@ -7511,7 +7778,7 @@
                 <a:ea typeface="Times New Roman" pitchFamily="34" charset="-122"/>
                 <a:cs typeface="Times New Roman" pitchFamily="34" charset="-120"/>
               </a:rPr>
-              <a:t>What can the farmer give them?</a:t>
+              <a:t>What happens to the water pipes?</a:t>
             </a:r>
             <a:endParaRPr lang="en-US" sz="4000" dirty="0"/>
           </a:p>
@@ -7730,7 +7997,7 @@
                 <a:ea typeface="Times New Roman" pitchFamily="34" charset="-122"/>
                 <a:cs typeface="Times New Roman" pitchFamily="34" charset="-120"/>
               </a:rPr>
-              <a:t>Hay that he stored in summer.</a:t>
+              <a:t>They freeze.</a:t>
             </a:r>
             <a:endParaRPr lang="en-US" sz="4000" dirty="0"/>
           </a:p>
@@ -8382,7 +8649,7 @@
                 <a:ea typeface="Times New Roman" pitchFamily="34" charset="-122"/>
                 <a:cs typeface="Times New Roman" pitchFamily="34" charset="-120"/>
               </a:rPr>
-              <a:t>A machine clears the snow from a road.</a:t>
+              <a:t>A machine on a snowy road.</a:t>
             </a:r>
             <a:endParaRPr lang="en-US" sz="1800" dirty="0"/>
           </a:p>
@@ -9196,7 +9463,7 @@
                 <a:ea typeface="Times New Roman" pitchFamily="34" charset="-122"/>
                 <a:cs typeface="Times New Roman" pitchFamily="34" charset="-120"/>
               </a:rPr>
-              <a:t>What problem does snow cause? How do people solve it?</a:t>
+              <a:t>How do people clear roads blocked by snow?</a:t>
             </a:r>
             <a:endParaRPr lang="en-US" sz="4000" dirty="0"/>
           </a:p>
@@ -9415,7 +9682,7 @@
                 <a:ea typeface="Times New Roman" pitchFamily="34" charset="-122"/>
                 <a:cs typeface="Times New Roman" pitchFamily="34" charset="-120"/>
               </a:rPr>
-              <a:t>It blocks the roads. Machines clear the snow.</a:t>
+              <a:t>With machines (snowploughs).</a:t>
             </a:r>
             <a:endParaRPr lang="en-US" sz="4000" dirty="0"/>
           </a:p>
@@ -9629,7 +9896,7 @@
                 <a:ea typeface="Times New Roman" pitchFamily="34" charset="-122"/>
                 <a:cs typeface="Times New Roman" pitchFamily="34" charset="-120"/>
               </a:rPr>
-              <a:t>A dust storm on a farm in the USA in the 1930s.</a:t>
+              <a:t>A dust storm on farms.</a:t>
             </a:r>
             <a:endParaRPr lang="en-US" sz="1800" dirty="0"/>
           </a:p>
@@ -9848,7 +10115,7 @@
                 <a:ea typeface="Times New Roman" pitchFamily="34" charset="-122"/>
                 <a:cs typeface="Times New Roman" pitchFamily="34" charset="-120"/>
               </a:rPr>
-              <a:t>The wind blew away the dry soil of the farms. What was this disaster called?</a:t>
+              <a:t>What did the wind do to the dry soil of these farms?</a:t>
             </a:r>
             <a:endParaRPr lang="en-US" sz="4000" dirty="0"/>
           </a:p>
@@ -10067,7 +10334,7 @@
                 <a:ea typeface="Times New Roman" pitchFamily="34" charset="-122"/>
                 <a:cs typeface="Times New Roman" pitchFamily="34" charset="-120"/>
               </a:rPr>
-              <a:t>The Dust Bowl.</a:t>
+              <a:t>It blew it away.</a:t>
             </a:r>
             <a:endParaRPr lang="en-US" sz="4000" dirty="0"/>
           </a:p>
@@ -10281,7 +10548,7 @@
                 <a:ea typeface="Times New Roman" pitchFamily="34" charset="-122"/>
                 <a:cs typeface="Times New Roman" pitchFamily="34" charset="-120"/>
               </a:rPr>
-              <a:t>A forest fire in Greece in summer.</a:t>
+              <a:t>A forest fire.</a:t>
             </a:r>
             <a:endParaRPr lang="en-US" sz="1800" dirty="0"/>
           </a:p>
@@ -10500,7 +10767,7 @@
                 <a:ea typeface="Times New Roman" pitchFamily="34" charset="-122"/>
                 <a:cs typeface="Times New Roman" pitchFamily="34" charset="-120"/>
               </a:rPr>
-              <a:t>Why are there forest fires around the Mediterranean in summer?</a:t>
+              <a:t>Why are there forest fires in Mediterranean summers?</a:t>
             </a:r>
             <a:endParaRPr lang="en-US" sz="4000" dirty="0"/>
           </a:p>
@@ -10719,7 +10986,7 @@
                 <a:ea typeface="Times New Roman" pitchFamily="34" charset="-122"/>
                 <a:cs typeface="Times New Roman" pitchFamily="34" charset="-120"/>
               </a:rPr>
-              <a:t>The summer is hot and dry, so plants burn easily.</a:t>
+              <a:t>Summers are hot and dry, so plants burn easily.</a:t>
             </a:r>
             <a:endParaRPr lang="en-US" sz="4000" dirty="0"/>
           </a:p>
@@ -10933,7 +11200,7 @@
                 <a:ea typeface="Times New Roman" pitchFamily="34" charset="-122"/>
                 <a:cs typeface="Times New Roman" pitchFamily="34" charset="-120"/>
               </a:rPr>
-              <a:t>Vegetables grow inside a glass house.</a:t>
+              <a:t>A greenhouse.</a:t>
             </a:r>
             <a:endParaRPr lang="en-US" sz="1800" dirty="0"/>
           </a:p>
@@ -12380,7 +12647,7 @@
                 <a:ea typeface="Times New Roman" pitchFamily="34" charset="-122"/>
                 <a:cs typeface="Times New Roman" pitchFamily="34" charset="-120"/>
               </a:rPr>
-              <a:t>They grow them in greenhouses, where it is warm.</a:t>
+              <a:t>In greenhouses, where it is warm.</a:t>
             </a:r>
             <a:endParaRPr lang="en-US" sz="4000" dirty="0"/>
           </a:p>
@@ -13032,7 +13299,7 @@
                 <a:ea typeface="Times New Roman" pitchFamily="34" charset="-122"/>
                 <a:cs typeface="Times New Roman" pitchFamily="34" charset="-120"/>
               </a:rPr>
-              <a:t>The trees stop the wind, so the soil is not blown away.</a:t>
+              <a:t>To stop the wind from blowing the soil away.</a:t>
             </a:r>
             <a:endParaRPr lang="en-US" sz="4000" dirty="0"/>
           </a:p>
@@ -13426,7 +13693,7 @@
         <p:spPr>
           <a:xfrm>
             <a:off x="0" y="658368"/>
-            <a:ext cx="5120640" cy="5833872"/>
+            <a:ext cx="2468880" cy="5833872"/>
           </a:xfrm>
           <a:prstGeom prst="rect">
             <a:avLst/>
@@ -13441,8 +13708,8 @@
         </p:nvSpPr>
         <p:spPr>
           <a:xfrm>
-            <a:off x="5349240" y="1005840"/>
-            <a:ext cx="6522415" cy="731520"/>
+            <a:off x="2697480" y="1005840"/>
+            <a:ext cx="9174175" cy="731520"/>
           </a:xfrm>
           <a:prstGeom prst="rect">
             <a:avLst/>
@@ -13482,8 +13749,8 @@
         </p:nvSpPr>
         <p:spPr>
           <a:xfrm>
-            <a:off x="5349240" y="1783080"/>
-            <a:ext cx="6522415" cy="4663440"/>
+            <a:off x="2697480" y="1783080"/>
+            <a:ext cx="9174175" cy="4663440"/>
           </a:xfrm>
           <a:prstGeom prst="rect">
             <a:avLst/>
@@ -13515,11 +13782,12 @@
             <a:endParaRPr lang="en-US" sz="4000" dirty="0"/>
           </a:p>
           <a:p>
-            <a:pPr algn="l" indent="0" marL="0">
+            <a:pPr algn="l" marL="342900" indent="-342900">
               <a:spcAft>
                 <a:spcPts val="800"/>
               </a:spcAft>
-              <a:buNone/>
+              <a:buSzPct val="100000"/>
+              <a:buChar char="•"/>
             </a:pPr>
             <a:r>
               <a:rPr lang="en-US" sz="4000" b="1" dirty="0">
@@ -13532,11 +13800,12 @@
               </a:rPr>
               <a:t>Greenhouse: </a:t>
             </a:r>
-            <a:pPr algn="l" indent="0" marL="0">
+            <a:pPr algn="l" marL="342900" indent="-342900">
               <a:spcAft>
                 <a:spcPts val="800"/>
               </a:spcAft>
-              <a:buNone/>
+              <a:buSzPct val="100000"/>
+              <a:buChar char="•"/>
             </a:pPr>
             <a:r>
               <a:rPr lang="en-US" sz="4000" dirty="0">
@@ -13547,16 +13816,17 @@
                 <a:ea typeface="Times New Roman" pitchFamily="34" charset="-122"/>
                 <a:cs typeface="Times New Roman" pitchFamily="34" charset="-120"/>
               </a:rPr>
-              <a:t>It is a glass house where plants grow in warmth.</a:t>
+              <a:t>It is a glass or plastic house where plants are grown in warm conditions.</a:t>
             </a:r>
             <a:endParaRPr lang="en-US" sz="4000" dirty="0"/>
           </a:p>
           <a:p>
-            <a:pPr algn="l" indent="0" marL="0">
+            <a:pPr algn="l" marL="342900" indent="-342900">
               <a:spcAft>
                 <a:spcPts val="800"/>
               </a:spcAft>
-              <a:buNone/>
+              <a:buSzPct val="100000"/>
+              <a:buChar char="•"/>
             </a:pPr>
             <a:r>
               <a:rPr lang="en-US" sz="4000" b="1" dirty="0">
@@ -13567,13 +13837,14 @@
                 <a:ea typeface="Times New Roman" pitchFamily="34" charset="-122"/>
                 <a:cs typeface="Times New Roman" pitchFamily="34" charset="-120"/>
               </a:rPr>
-              <a:t>Shelterbelt: </a:t>
-            </a:r>
-            <a:pPr algn="l" indent="0" marL="0">
+              <a:t>Shelter belt: </a:t>
+            </a:r>
+            <a:pPr algn="l" marL="342900" indent="-342900">
               <a:spcAft>
                 <a:spcPts val="800"/>
               </a:spcAft>
-              <a:buNone/>
+              <a:buSzPct val="100000"/>
+              <a:buChar char="•"/>
             </a:pPr>
             <a:r>
               <a:rPr lang="en-US" sz="4000" dirty="0">
@@ -13584,7 +13855,7 @@
                 <a:ea typeface="Times New Roman" pitchFamily="34" charset="-122"/>
                 <a:cs typeface="Times New Roman" pitchFamily="34" charset="-120"/>
               </a:rPr>
-              <a:t>It is a line of trees that stops the wind.</a:t>
+              <a:t>It is a line of trees that protects fields from the wind.</a:t>
             </a:r>
             <a:endParaRPr lang="en-US" sz="4000" dirty="0"/>
           </a:p>
@@ -13702,9 +13973,131 @@
           </a:p>
         </p:txBody>
       </p:sp>
+      <p:sp>
+        <p:nvSpPr>
+          <p:cNvPr id="3" name="Text 1"/>
+          <p:cNvSpPr/>
+          <p:nvPr/>
+        </p:nvSpPr>
+        <p:spPr>
+          <a:xfrm>
+            <a:off x="365760" y="1005840"/>
+            <a:ext cx="11460175" cy="731520"/>
+          </a:xfrm>
+          <a:prstGeom prst="rect">
+            <a:avLst/>
+          </a:prstGeom>
+          <a:noFill/>
+          <a:ln/>
+        </p:spPr>
+        <p:txBody>
+          <a:bodyPr wrap="square" lIns="0" tIns="0" rIns="0" bIns="0" rtlCol="0" anchor="ctr">
+            <a:normAutofit/>
+          </a:bodyPr>
+          <a:lstStyle/>
+          <a:p>
+            <a:pPr algn="ctr" indent="0" marL="0">
+              <a:buNone/>
+            </a:pPr>
+            <a:r>
+              <a:rPr lang="en-US" sz="3600" b="1" dirty="0">
+                <a:solidFill>
+                  <a:srgbClr val="990011"/>
+                </a:solidFill>
+                <a:latin typeface="Times New Roman" pitchFamily="34" charset="0"/>
+                <a:ea typeface="Times New Roman" pitchFamily="34" charset="-122"/>
+                <a:cs typeface="Times New Roman" pitchFamily="34" charset="-120"/>
+              </a:rPr>
+              <a:t>1. Problems Faced</a:t>
+            </a:r>
+            <a:endParaRPr lang="en-US" sz="3600" dirty="0"/>
+          </a:p>
+        </p:txBody>
+      </p:sp>
+      <p:sp>
+        <p:nvSpPr>
+          <p:cNvPr id="4" name="Text 2"/>
+          <p:cNvSpPr/>
+          <p:nvPr/>
+        </p:nvSpPr>
+        <p:spPr>
+          <a:xfrm>
+            <a:off x="365760" y="1783080"/>
+            <a:ext cx="4846320" cy="4617720"/>
+          </a:xfrm>
+          <a:prstGeom prst="rect">
+            <a:avLst/>
+          </a:prstGeom>
+          <a:noFill/>
+          <a:ln/>
+        </p:spPr>
+        <p:txBody>
+          <a:bodyPr wrap="square" lIns="0" tIns="0" rIns="0" bIns="0" rtlCol="0" anchor="t"/>
+          <a:lstStyle/>
+          <a:p>
+            <a:pPr algn="l" indent="0" marL="0">
+              <a:spcAft>
+                <a:spcPts val="800"/>
+              </a:spcAft>
+              <a:buNone/>
+            </a:pPr>
+            <a:r>
+              <a:rPr lang="en-US" sz="3600" i="1" dirty="0">
+                <a:solidFill>
+                  <a:srgbClr val="111111"/>
+                </a:solidFill>
+                <a:latin typeface="Times New Roman" pitchFamily="34" charset="0"/>
+                <a:ea typeface="Times New Roman" pitchFamily="34" charset="-122"/>
+                <a:cs typeface="Times New Roman" pitchFamily="34" charset="-120"/>
+              </a:rPr>
+              <a:t>People in the temperate region face the following problems:</a:t>
+            </a:r>
+            <a:endParaRPr lang="en-US" sz="3600" dirty="0"/>
+          </a:p>
+          <a:p>
+            <a:pPr algn="l" marL="342900" indent="-342900">
+              <a:spcAft>
+                <a:spcPts val="800"/>
+              </a:spcAft>
+              <a:buSzPct val="100000"/>
+              <a:buChar char="•"/>
+            </a:pPr>
+            <a:r>
+              <a:rPr lang="en-US" sz="3600" b="1" dirty="0">
+                <a:solidFill>
+                  <a:srgbClr val="111111"/>
+                </a:solidFill>
+                <a:latin typeface="Times New Roman" pitchFamily="34" charset="0"/>
+                <a:ea typeface="Times New Roman" pitchFamily="34" charset="-122"/>
+                <a:cs typeface="Times New Roman" pitchFamily="34" charset="-120"/>
+              </a:rPr>
+              <a:t>Cold winters: </a:t>
+            </a:r>
+            <a:pPr algn="l" marL="342900" indent="-342900">
+              <a:spcAft>
+                <a:spcPts val="800"/>
+              </a:spcAft>
+              <a:buSzPct val="100000"/>
+              <a:buChar char="•"/>
+            </a:pPr>
+            <a:r>
+              <a:rPr lang="en-US" sz="3600" dirty="0">
+                <a:solidFill>
+                  <a:srgbClr val="111111"/>
+                </a:solidFill>
+                <a:latin typeface="Times New Roman" pitchFamily="34" charset="0"/>
+                <a:ea typeface="Times New Roman" pitchFamily="34" charset="-122"/>
+                <a:cs typeface="Times New Roman" pitchFamily="34" charset="-120"/>
+              </a:rPr>
+              <a:t>Snow and ice block roads and freeze pipes.</a:t>
+            </a:r>
+            <a:endParaRPr lang="en-US" sz="3600" dirty="0"/>
+          </a:p>
+        </p:txBody>
+      </p:sp>
       <p:pic>
         <p:nvPicPr>
-          <p:cNvPr id="3" name="Image 0" descr="/home/claude/f4/img/minesec_sheet.png">    </p:cNvPr>
+          <p:cNvPr id="5" name="Image 0" descr="/home/claude/f4/img/v2/f2t_snowplough.jpg">    </p:cNvPr>
           <p:cNvPicPr>
             <a:picLocks noChangeAspect="1"/>
           </p:cNvPicPr>
@@ -13718,8 +14111,8 @@
         </p:blipFill>
         <p:spPr>
           <a:xfrm>
-            <a:off x="0" y="658368"/>
-            <a:ext cx="3840480" cy="5833872"/>
+            <a:off x="5349240" y="2071212"/>
+            <a:ext cx="6659575" cy="3693983"/>
           </a:xfrm>
           <a:prstGeom prst="rect">
             <a:avLst/>
@@ -13728,14 +14121,14 @@
       </p:pic>
       <p:sp>
         <p:nvSpPr>
-          <p:cNvPr id="4" name="Text 1"/>
+          <p:cNvPr id="6" name="Text 3"/>
           <p:cNvSpPr/>
           <p:nvPr/>
         </p:nvSpPr>
         <p:spPr>
           <a:xfrm>
-            <a:off x="4069080" y="1005840"/>
-            <a:ext cx="7802575" cy="731520"/>
+            <a:off x="5349240" y="6089904"/>
+            <a:ext cx="6659575" cy="347472"/>
           </a:xfrm>
           <a:prstGeom prst="rect">
             <a:avLst/>
@@ -13744,142 +14137,24 @@
           <a:ln/>
         </p:spPr>
         <p:txBody>
-          <a:bodyPr wrap="square" lIns="0" tIns="0" rIns="0" bIns="0" rtlCol="0" anchor="ctr">
-            <a:normAutofit/>
-          </a:bodyPr>
+          <a:bodyPr wrap="square" lIns="0" tIns="0" rIns="0" bIns="0" rtlCol="0" anchor="ctr"/>
           <a:lstStyle/>
           <a:p>
             <a:pPr algn="ctr" indent="0" marL="0">
               <a:buNone/>
             </a:pPr>
             <a:r>
-              <a:rPr lang="en-US" sz="3600" b="1" dirty="0">
-                <a:solidFill>
-                  <a:srgbClr val="990011"/>
+              <a:rPr lang="en-US" sz="1600" i="1" dirty="0">
+                <a:solidFill>
+                  <a:srgbClr val="555555"/>
                 </a:solidFill>
                 <a:latin typeface="Times New Roman" pitchFamily="34" charset="0"/>
                 <a:ea typeface="Times New Roman" pitchFamily="34" charset="-122"/>
                 <a:cs typeface="Times New Roman" pitchFamily="34" charset="-120"/>
               </a:rPr>
-              <a:t>1. Problems Faced</a:t>
-            </a:r>
-            <a:endParaRPr lang="en-US" sz="3600" dirty="0"/>
-          </a:p>
-        </p:txBody>
-      </p:sp>
-      <p:sp>
-        <p:nvSpPr>
-          <p:cNvPr id="5" name="Text 2"/>
-          <p:cNvSpPr/>
-          <p:nvPr/>
-        </p:nvSpPr>
-        <p:spPr>
-          <a:xfrm>
-            <a:off x="4069080" y="1783080"/>
-            <a:ext cx="7802575" cy="4663440"/>
-          </a:xfrm>
-          <a:prstGeom prst="rect">
-            <a:avLst/>
-          </a:prstGeom>
-          <a:noFill/>
-          <a:ln/>
-        </p:spPr>
-        <p:txBody>
-          <a:bodyPr wrap="square" lIns="0" tIns="0" rIns="0" bIns="0" rtlCol="0" anchor="t"/>
-          <a:lstStyle/>
-          <a:p>
-            <a:pPr algn="l" indent="0" marL="0">
-              <a:spcAft>
-                <a:spcPts val="800"/>
-              </a:spcAft>
-              <a:buNone/>
-            </a:pPr>
-            <a:r>
-              <a:rPr lang="en-US" sz="4000" i="1" dirty="0">
-                <a:solidFill>
-                  <a:srgbClr val="111111"/>
-                </a:solidFill>
-                <a:latin typeface="Times New Roman" pitchFamily="34" charset="0"/>
-                <a:ea typeface="Times New Roman" pitchFamily="34" charset="-122"/>
-                <a:cs typeface="Times New Roman" pitchFamily="34" charset="-120"/>
-              </a:rPr>
-              <a:t>People in the temperate region face the following problems:</a:t>
-            </a:r>
-            <a:endParaRPr lang="en-US" sz="4000" dirty="0"/>
-          </a:p>
-          <a:p>
-            <a:pPr algn="l" indent="0" marL="0">
-              <a:spcAft>
-                <a:spcPts val="800"/>
-              </a:spcAft>
-              <a:buNone/>
-            </a:pPr>
-            <a:r>
-              <a:rPr lang="en-US" sz="4000" b="1" dirty="0">
-                <a:solidFill>
-                  <a:srgbClr val="111111"/>
-                </a:solidFill>
-                <a:latin typeface="Times New Roman" pitchFamily="34" charset="0"/>
-                <a:ea typeface="Times New Roman" pitchFamily="34" charset="-122"/>
-                <a:cs typeface="Times New Roman" pitchFamily="34" charset="-120"/>
-              </a:rPr>
-              <a:t>Cold winters: </a:t>
-            </a:r>
-            <a:pPr algn="l" indent="0" marL="0">
-              <a:spcAft>
-                <a:spcPts val="800"/>
-              </a:spcAft>
-              <a:buNone/>
-            </a:pPr>
-            <a:r>
-              <a:rPr lang="en-US" sz="4000" dirty="0">
-                <a:solidFill>
-                  <a:srgbClr val="111111"/>
-                </a:solidFill>
-                <a:latin typeface="Times New Roman" pitchFamily="34" charset="0"/>
-                <a:ea typeface="Times New Roman" pitchFamily="34" charset="-122"/>
-                <a:cs typeface="Times New Roman" pitchFamily="34" charset="-120"/>
-              </a:rPr>
-              <a:t>Snow blocks roads and cold freezes water pipes.</a:t>
-            </a:r>
-            <a:endParaRPr lang="en-US" sz="4000" dirty="0"/>
-          </a:p>
-          <a:p>
-            <a:pPr algn="l" indent="0" marL="0">
-              <a:spcAft>
-                <a:spcPts val="800"/>
-              </a:spcAft>
-              <a:buNone/>
-            </a:pPr>
-            <a:r>
-              <a:rPr lang="en-US" sz="4000" b="1" dirty="0">
-                <a:solidFill>
-                  <a:srgbClr val="111111"/>
-                </a:solidFill>
-                <a:latin typeface="Times New Roman" pitchFamily="34" charset="0"/>
-                <a:ea typeface="Times New Roman" pitchFamily="34" charset="-122"/>
-                <a:cs typeface="Times New Roman" pitchFamily="34" charset="-120"/>
-              </a:rPr>
-              <a:t>Short growing season: </a:t>
-            </a:r>
-            <a:pPr algn="l" indent="0" marL="0">
-              <a:spcAft>
-                <a:spcPts val="800"/>
-              </a:spcAft>
-              <a:buNone/>
-            </a:pPr>
-            <a:r>
-              <a:rPr lang="en-US" sz="4000" dirty="0">
-                <a:solidFill>
-                  <a:srgbClr val="111111"/>
-                </a:solidFill>
-                <a:latin typeface="Times New Roman" pitchFamily="34" charset="0"/>
-                <a:ea typeface="Times New Roman" pitchFamily="34" charset="-122"/>
-                <a:cs typeface="Times New Roman" pitchFamily="34" charset="-120"/>
-              </a:rPr>
-              <a:t>Crops can grow only in spring and summer.</a:t>
-            </a:r>
-            <a:endParaRPr lang="en-US" sz="4000" dirty="0"/>
+              <a:t>Illustration: clearing snow</a:t>
+            </a:r>
+            <a:endParaRPr lang="en-US" sz="1600" dirty="0"/>
           </a:p>
         </p:txBody>
       </p:sp>
@@ -14012,7 +14287,7 @@
         <p:spPr>
           <a:xfrm>
             <a:off x="0" y="658368"/>
-            <a:ext cx="2468880" cy="5833872"/>
+            <a:ext cx="5120640" cy="5833872"/>
           </a:xfrm>
           <a:prstGeom prst="rect">
             <a:avLst/>
@@ -14027,8 +14302,8 @@
         </p:nvSpPr>
         <p:spPr>
           <a:xfrm>
-            <a:off x="2697480" y="1005840"/>
-            <a:ext cx="9174175" cy="731520"/>
+            <a:off x="5349240" y="1005840"/>
+            <a:ext cx="6522415" cy="731520"/>
           </a:xfrm>
           <a:prstGeom prst="rect">
             <a:avLst/>
@@ -14054,7 +14329,7 @@
                 <a:ea typeface="Times New Roman" pitchFamily="34" charset="-122"/>
                 <a:cs typeface="Times New Roman" pitchFamily="34" charset="-120"/>
               </a:rPr>
-              <a:t>1. Problems Faced (continued)</a:t>
+              <a:t>1. Problems Faced</a:t>
             </a:r>
             <a:endParaRPr lang="en-US" sz="3600" dirty="0"/>
           </a:p>
@@ -14068,8 +14343,8 @@
         </p:nvSpPr>
         <p:spPr>
           <a:xfrm>
-            <a:off x="2697480" y="1783080"/>
-            <a:ext cx="9174175" cy="4663440"/>
+            <a:off x="5349240" y="1783080"/>
+            <a:ext cx="6522415" cy="4663440"/>
           </a:xfrm>
           <a:prstGeom prst="rect">
             <a:avLst/>
@@ -14081,11 +14356,12 @@
           <a:bodyPr wrap="square" lIns="0" tIns="0" rIns="0" bIns="0" rtlCol="0" anchor="t"/>
           <a:lstStyle/>
           <a:p>
-            <a:pPr algn="l" indent="0" marL="0">
+            <a:pPr algn="l" marL="342900" indent="-342900">
               <a:spcAft>
                 <a:spcPts val="800"/>
               </a:spcAft>
-              <a:buNone/>
+              <a:buSzPct val="100000"/>
+              <a:buChar char="•"/>
             </a:pPr>
             <a:r>
               <a:rPr lang="en-US" sz="4000" b="1" dirty="0">
@@ -14096,13 +14372,14 @@
                 <a:ea typeface="Times New Roman" pitchFamily="34" charset="-122"/>
                 <a:cs typeface="Times New Roman" pitchFamily="34" charset="-120"/>
               </a:rPr>
-              <a:t>Soil erosion: </a:t>
-            </a:r>
-            <a:pPr algn="l" indent="0" marL="0">
+              <a:t>Short growing season: </a:t>
+            </a:r>
+            <a:pPr algn="l" marL="342900" indent="-342900">
               <a:spcAft>
                 <a:spcPts val="800"/>
               </a:spcAft>
-              <a:buNone/>
+              <a:buSzPct val="100000"/>
+              <a:buChar char="•"/>
             </a:pPr>
             <a:r>
               <a:rPr lang="en-US" sz="4000" dirty="0">
@@ -14113,16 +14390,17 @@
                 <a:ea typeface="Times New Roman" pitchFamily="34" charset="-122"/>
                 <a:cs typeface="Times New Roman" pitchFamily="34" charset="-120"/>
               </a:rPr>
-              <a:t>The wind blows away dry soil, as in the Dust Bowl of the USA.</a:t>
+              <a:t>Crops cannot grow in winter.</a:t>
             </a:r>
             <a:endParaRPr lang="en-US" sz="4000" dirty="0"/>
           </a:p>
           <a:p>
-            <a:pPr algn="l" indent="0" marL="0">
+            <a:pPr algn="l" marL="342900" indent="-342900">
               <a:spcAft>
                 <a:spcPts val="800"/>
               </a:spcAft>
-              <a:buNone/>
+              <a:buSzPct val="100000"/>
+              <a:buChar char="•"/>
             </a:pPr>
             <a:r>
               <a:rPr lang="en-US" sz="4000" b="1" dirty="0">
@@ -14133,13 +14411,14 @@
                 <a:ea typeface="Times New Roman" pitchFamily="34" charset="-122"/>
                 <a:cs typeface="Times New Roman" pitchFamily="34" charset="-120"/>
               </a:rPr>
-              <a:t>Forest fires: </a:t>
-            </a:r>
-            <a:pPr algn="l" indent="0" marL="0">
+              <a:t>Soil erosion by wind: </a:t>
+            </a:r>
+            <a:pPr algn="l" marL="342900" indent="-342900">
               <a:spcAft>
                 <a:spcPts val="800"/>
               </a:spcAft>
-              <a:buNone/>
+              <a:buSzPct val="100000"/>
+              <a:buChar char="•"/>
             </a:pPr>
             <a:r>
               <a:rPr lang="en-US" sz="4000" dirty="0">
@@ -14150,44 +14429,7 @@
                 <a:ea typeface="Times New Roman" pitchFamily="34" charset="-122"/>
                 <a:cs typeface="Times New Roman" pitchFamily="34" charset="-120"/>
               </a:rPr>
-              <a:t>Fires burn the forests around the Mediterranean in the dry summer.</a:t>
-            </a:r>
-            <a:endParaRPr lang="en-US" sz="4000" dirty="0"/>
-          </a:p>
-          <a:p>
-            <a:pPr algn="l" indent="0" marL="0">
-              <a:spcAft>
-                <a:spcPts val="800"/>
-              </a:spcAft>
-              <a:buNone/>
-            </a:pPr>
-            <a:r>
-              <a:rPr lang="en-US" sz="4000" b="1" dirty="0">
-                <a:solidFill>
-                  <a:srgbClr val="111111"/>
-                </a:solidFill>
-                <a:latin typeface="Times New Roman" pitchFamily="34" charset="0"/>
-                <a:ea typeface="Times New Roman" pitchFamily="34" charset="-122"/>
-                <a:cs typeface="Times New Roman" pitchFamily="34" charset="-120"/>
-              </a:rPr>
-              <a:t>Pollution: </a:t>
-            </a:r>
-            <a:pPr algn="l" indent="0" marL="0">
-              <a:spcAft>
-                <a:spcPts val="800"/>
-              </a:spcAft>
-              <a:buNone/>
-            </a:pPr>
-            <a:r>
-              <a:rPr lang="en-US" sz="4000" dirty="0">
-                <a:solidFill>
-                  <a:srgbClr val="111111"/>
-                </a:solidFill>
-                <a:latin typeface="Times New Roman" pitchFamily="34" charset="0"/>
-                <a:ea typeface="Times New Roman" pitchFamily="34" charset="-122"/>
-                <a:cs typeface="Times New Roman" pitchFamily="34" charset="-120"/>
-              </a:rPr>
-              <a:t>Fertilisers and factories pollute rivers and the air.</a:t>
+              <a:t>Dry soil is blown away, as in the Dust Bowl.</a:t>
             </a:r>
             <a:endParaRPr lang="en-US" sz="4000" dirty="0"/>
           </a:p>
@@ -14305,9 +14547,111 @@
           </a:p>
         </p:txBody>
       </p:sp>
+      <p:sp>
+        <p:nvSpPr>
+          <p:cNvPr id="3" name="Text 1"/>
+          <p:cNvSpPr/>
+          <p:nvPr/>
+        </p:nvSpPr>
+        <p:spPr>
+          <a:xfrm>
+            <a:off x="365760" y="1005840"/>
+            <a:ext cx="11460175" cy="731520"/>
+          </a:xfrm>
+          <a:prstGeom prst="rect">
+            <a:avLst/>
+          </a:prstGeom>
+          <a:noFill/>
+          <a:ln/>
+        </p:spPr>
+        <p:txBody>
+          <a:bodyPr wrap="square" lIns="0" tIns="0" rIns="0" bIns="0" rtlCol="0" anchor="ctr">
+            <a:normAutofit/>
+          </a:bodyPr>
+          <a:lstStyle/>
+          <a:p>
+            <a:pPr algn="ctr" indent="0" marL="0">
+              <a:buNone/>
+            </a:pPr>
+            <a:r>
+              <a:rPr lang="en-US" sz="3600" b="1" dirty="0">
+                <a:solidFill>
+                  <a:srgbClr val="990011"/>
+                </a:solidFill>
+                <a:latin typeface="Times New Roman" pitchFamily="34" charset="0"/>
+                <a:ea typeface="Times New Roman" pitchFamily="34" charset="-122"/>
+                <a:cs typeface="Times New Roman" pitchFamily="34" charset="-120"/>
+              </a:rPr>
+              <a:t>1. Problems Faced</a:t>
+            </a:r>
+            <a:endParaRPr lang="en-US" sz="3600" dirty="0"/>
+          </a:p>
+        </p:txBody>
+      </p:sp>
+      <p:sp>
+        <p:nvSpPr>
+          <p:cNvPr id="4" name="Text 2"/>
+          <p:cNvSpPr/>
+          <p:nvPr/>
+        </p:nvSpPr>
+        <p:spPr>
+          <a:xfrm>
+            <a:off x="365760" y="1783080"/>
+            <a:ext cx="4846320" cy="4617720"/>
+          </a:xfrm>
+          <a:prstGeom prst="rect">
+            <a:avLst/>
+          </a:prstGeom>
+          <a:noFill/>
+          <a:ln/>
+        </p:spPr>
+        <p:txBody>
+          <a:bodyPr wrap="square" lIns="0" tIns="0" rIns="0" bIns="0" rtlCol="0" anchor="t"/>
+          <a:lstStyle/>
+          <a:p>
+            <a:pPr algn="l" marL="342900" indent="-342900">
+              <a:spcAft>
+                <a:spcPts val="800"/>
+              </a:spcAft>
+              <a:buSzPct val="100000"/>
+              <a:buChar char="•"/>
+            </a:pPr>
+            <a:r>
+              <a:rPr lang="en-US" sz="3600" b="1" dirty="0">
+                <a:solidFill>
+                  <a:srgbClr val="111111"/>
+                </a:solidFill>
+                <a:latin typeface="Times New Roman" pitchFamily="34" charset="0"/>
+                <a:ea typeface="Times New Roman" pitchFamily="34" charset="-122"/>
+                <a:cs typeface="Times New Roman" pitchFamily="34" charset="-120"/>
+              </a:rPr>
+              <a:t>Summer droughts and fires: </a:t>
+            </a:r>
+            <a:pPr algn="l" marL="342900" indent="-342900">
+              <a:spcAft>
+                <a:spcPts val="800"/>
+              </a:spcAft>
+              <a:buSzPct val="100000"/>
+              <a:buChar char="•"/>
+            </a:pPr>
+            <a:r>
+              <a:rPr lang="en-US" sz="3600" dirty="0">
+                <a:solidFill>
+                  <a:srgbClr val="111111"/>
+                </a:solidFill>
+                <a:latin typeface="Times New Roman" pitchFamily="34" charset="0"/>
+                <a:ea typeface="Times New Roman" pitchFamily="34" charset="-122"/>
+                <a:cs typeface="Times New Roman" pitchFamily="34" charset="-120"/>
+              </a:rPr>
+              <a:t>Hot, dry summers in Mediterranean lands.</a:t>
+            </a:r>
+            <a:endParaRPr lang="en-US" sz="3600" dirty="0"/>
+          </a:p>
+        </p:txBody>
+      </p:sp>
       <p:pic>
         <p:nvPicPr>
-          <p:cNvPr id="3" name="Image 0" descr="/home/claude/f4/img/minesec_sheet.png">    </p:cNvPr>
+          <p:cNvPr id="5" name="Image 0" descr="/home/claude/f4/img/v2/f2t_forest_fire.jpg">    </p:cNvPr>
           <p:cNvPicPr>
             <a:picLocks noChangeAspect="1"/>
           </p:cNvPicPr>
@@ -14321,8 +14665,8 @@
         </p:blipFill>
         <p:spPr>
           <a:xfrm>
-            <a:off x="0" y="658368"/>
-            <a:ext cx="3840480" cy="5833872"/>
+            <a:off x="5349240" y="2069407"/>
+            <a:ext cx="6659575" cy="3697594"/>
           </a:xfrm>
           <a:prstGeom prst="rect">
             <a:avLst/>
@@ -14331,14 +14675,14 @@
       </p:pic>
       <p:sp>
         <p:nvSpPr>
-          <p:cNvPr id="4" name="Text 1"/>
+          <p:cNvPr id="6" name="Text 3"/>
           <p:cNvSpPr/>
           <p:nvPr/>
         </p:nvSpPr>
         <p:spPr>
           <a:xfrm>
-            <a:off x="4069080" y="1005840"/>
-            <a:ext cx="7802575" cy="731520"/>
+            <a:off x="5349240" y="6089904"/>
+            <a:ext cx="6659575" cy="347472"/>
           </a:xfrm>
           <a:prstGeom prst="rect">
             <a:avLst/>
@@ -14347,142 +14691,24 @@
           <a:ln/>
         </p:spPr>
         <p:txBody>
-          <a:bodyPr wrap="square" lIns="0" tIns="0" rIns="0" bIns="0" rtlCol="0" anchor="ctr">
-            <a:normAutofit/>
-          </a:bodyPr>
+          <a:bodyPr wrap="square" lIns="0" tIns="0" rIns="0" bIns="0" rtlCol="0" anchor="ctr"/>
           <a:lstStyle/>
           <a:p>
             <a:pPr algn="ctr" indent="0" marL="0">
               <a:buNone/>
             </a:pPr>
             <a:r>
-              <a:rPr lang="en-US" sz="3600" b="1" dirty="0">
-                <a:solidFill>
-                  <a:srgbClr val="990011"/>
+              <a:rPr lang="en-US" sz="1600" i="1" dirty="0">
+                <a:solidFill>
+                  <a:srgbClr val="555555"/>
                 </a:solidFill>
                 <a:latin typeface="Times New Roman" pitchFamily="34" charset="0"/>
                 <a:ea typeface="Times New Roman" pitchFamily="34" charset="-122"/>
                 <a:cs typeface="Times New Roman" pitchFamily="34" charset="-120"/>
               </a:rPr>
-              <a:t>2. Adaptations</a:t>
-            </a:r>
-            <a:endParaRPr lang="en-US" sz="3600" dirty="0"/>
-          </a:p>
-        </p:txBody>
-      </p:sp>
-      <p:sp>
-        <p:nvSpPr>
-          <p:cNvPr id="5" name="Text 2"/>
-          <p:cNvSpPr/>
-          <p:nvPr/>
-        </p:nvSpPr>
-        <p:spPr>
-          <a:xfrm>
-            <a:off x="4069080" y="1783080"/>
-            <a:ext cx="7802575" cy="4663440"/>
-          </a:xfrm>
-          <a:prstGeom prst="rect">
-            <a:avLst/>
-          </a:prstGeom>
-          <a:noFill/>
-          <a:ln/>
-        </p:spPr>
-        <p:txBody>
-          <a:bodyPr wrap="square" lIns="0" tIns="0" rIns="0" bIns="0" rtlCol="0" anchor="t"/>
-          <a:lstStyle/>
-          <a:p>
-            <a:pPr algn="l" indent="0" marL="0">
-              <a:spcAft>
-                <a:spcPts val="800"/>
-              </a:spcAft>
-              <a:buNone/>
-            </a:pPr>
-            <a:r>
-              <a:rPr lang="en-US" sz="4000" i="1" dirty="0">
-                <a:solidFill>
-                  <a:srgbClr val="111111"/>
-                </a:solidFill>
-                <a:latin typeface="Times New Roman" pitchFamily="34" charset="0"/>
-                <a:ea typeface="Times New Roman" pitchFamily="34" charset="-122"/>
-                <a:cs typeface="Times New Roman" pitchFamily="34" charset="-120"/>
-              </a:rPr>
-              <a:t>People adapt in the following ways:</a:t>
-            </a:r>
-            <a:endParaRPr lang="en-US" sz="4000" dirty="0"/>
-          </a:p>
-          <a:p>
-            <a:pPr algn="l" indent="0" marL="0">
-              <a:spcAft>
-                <a:spcPts val="800"/>
-              </a:spcAft>
-              <a:buNone/>
-            </a:pPr>
-            <a:r>
-              <a:rPr lang="en-US" sz="4000" b="1" dirty="0">
-                <a:solidFill>
-                  <a:srgbClr val="111111"/>
-                </a:solidFill>
-                <a:latin typeface="Times New Roman" pitchFamily="34" charset="0"/>
-                <a:ea typeface="Times New Roman" pitchFamily="34" charset="-122"/>
-                <a:cs typeface="Times New Roman" pitchFamily="34" charset="-120"/>
-              </a:rPr>
-              <a:t>Houses and clothes: </a:t>
-            </a:r>
-            <a:pPr algn="l" indent="0" marL="0">
-              <a:spcAft>
-                <a:spcPts val="800"/>
-              </a:spcAft>
-              <a:buNone/>
-            </a:pPr>
-            <a:r>
-              <a:rPr lang="en-US" sz="4000" dirty="0">
-                <a:solidFill>
-                  <a:srgbClr val="111111"/>
-                </a:solidFill>
-                <a:latin typeface="Times New Roman" pitchFamily="34" charset="0"/>
-                <a:ea typeface="Times New Roman" pitchFamily="34" charset="-122"/>
-                <a:cs typeface="Times New Roman" pitchFamily="34" charset="-120"/>
-              </a:rPr>
-              <a:t>People use heating, thick walls and warm coats in winter.</a:t>
-            </a:r>
-            <a:endParaRPr lang="en-US" sz="4000" dirty="0"/>
-          </a:p>
-          <a:p>
-            <a:pPr algn="l" indent="0" marL="0">
-              <a:spcAft>
-                <a:spcPts val="800"/>
-              </a:spcAft>
-              <a:buNone/>
-            </a:pPr>
-            <a:r>
-              <a:rPr lang="en-US" sz="4000" b="1" dirty="0">
-                <a:solidFill>
-                  <a:srgbClr val="111111"/>
-                </a:solidFill>
-                <a:latin typeface="Times New Roman" pitchFamily="34" charset="0"/>
-                <a:ea typeface="Times New Roman" pitchFamily="34" charset="-122"/>
-                <a:cs typeface="Times New Roman" pitchFamily="34" charset="-120"/>
-              </a:rPr>
-              <a:t>Transport: </a:t>
-            </a:r>
-            <a:pPr algn="l" indent="0" marL="0">
-              <a:spcAft>
-                <a:spcPts val="800"/>
-              </a:spcAft>
-              <a:buNone/>
-            </a:pPr>
-            <a:r>
-              <a:rPr lang="en-US" sz="4000" dirty="0">
-                <a:solidFill>
-                  <a:srgbClr val="111111"/>
-                </a:solidFill>
-                <a:latin typeface="Times New Roman" pitchFamily="34" charset="0"/>
-                <a:ea typeface="Times New Roman" pitchFamily="34" charset="-122"/>
-                <a:cs typeface="Times New Roman" pitchFamily="34" charset="-120"/>
-              </a:rPr>
-              <a:t>Machines clear snow from roads and railways.</a:t>
-            </a:r>
-            <a:endParaRPr lang="en-US" sz="4000" dirty="0"/>
+              <a:t>Illustration: a forest fire</a:t>
+            </a:r>
+            <a:endParaRPr lang="en-US" sz="1600" dirty="0"/>
           </a:p>
         </p:txBody>
       </p:sp>
@@ -14615,7 +14841,7 @@
         <p:spPr>
           <a:xfrm>
             <a:off x="0" y="658368"/>
-            <a:ext cx="5120640" cy="5833872"/>
+            <a:ext cx="3840480" cy="5833872"/>
           </a:xfrm>
           <a:prstGeom prst="rect">
             <a:avLst/>
@@ -14630,8 +14856,8 @@
         </p:nvSpPr>
         <p:spPr>
           <a:xfrm>
-            <a:off x="5349240" y="1005840"/>
-            <a:ext cx="6522415" cy="731520"/>
+            <a:off x="4069080" y="1005840"/>
+            <a:ext cx="7802575" cy="731520"/>
           </a:xfrm>
           <a:prstGeom prst="rect">
             <a:avLst/>
@@ -14657,7 +14883,7 @@
                 <a:ea typeface="Times New Roman" pitchFamily="34" charset="-122"/>
                 <a:cs typeface="Times New Roman" pitchFamily="34" charset="-120"/>
               </a:rPr>
-              <a:t>2. Adaptations (continued)</a:t>
+              <a:t>2. Adaptations</a:t>
             </a:r>
             <a:endParaRPr lang="en-US" sz="3600" dirty="0"/>
           </a:p>
@@ -14671,8 +14897,8 @@
         </p:nvSpPr>
         <p:spPr>
           <a:xfrm>
-            <a:off x="5349240" y="1783080"/>
-            <a:ext cx="6522415" cy="4663440"/>
+            <a:off x="4069080" y="1783080"/>
+            <a:ext cx="7802575" cy="4663440"/>
           </a:xfrm>
           <a:prstGeom prst="rect">
             <a:avLst/>
@@ -14691,7 +14917,7 @@
               <a:buNone/>
             </a:pPr>
             <a:r>
-              <a:rPr lang="en-US" sz="4000" b="1" dirty="0">
+              <a:rPr lang="en-US" sz="4000" i="1" dirty="0">
                 <a:solidFill>
                   <a:srgbClr val="111111"/>
                 </a:solidFill>
@@ -14699,16 +14925,20 @@
                 <a:ea typeface="Times New Roman" pitchFamily="34" charset="-122"/>
                 <a:cs typeface="Times New Roman" pitchFamily="34" charset="-120"/>
               </a:rPr>
-              <a:t>Farming: </a:t>
-            </a:r>
-            <a:pPr algn="l" indent="0" marL="0">
+              <a:t>People adapt in the following ways:</a:t>
+            </a:r>
+            <a:endParaRPr lang="en-US" sz="4000" dirty="0"/>
+          </a:p>
+          <a:p>
+            <a:pPr algn="l" marL="342900" indent="-342900">
               <a:spcAft>
                 <a:spcPts val="800"/>
               </a:spcAft>
-              <a:buNone/>
+              <a:buSzPct val="100000"/>
+              <a:buChar char="•"/>
             </a:pPr>
             <a:r>
-              <a:rPr lang="en-US" sz="4000" dirty="0">
+              <a:rPr lang="en-US" sz="4000" b="1" dirty="0">
                 <a:solidFill>
                   <a:srgbClr val="111111"/>
                 </a:solidFill>
@@ -14716,19 +14946,17 @@
                 <a:ea typeface="Times New Roman" pitchFamily="34" charset="-122"/>
                 <a:cs typeface="Times New Roman" pitchFamily="34" charset="-120"/>
               </a:rPr>
-              <a:t>Farmers use greenhouses and store hay to feed animals in winter.</a:t>
-            </a:r>
-            <a:endParaRPr lang="en-US" sz="4000" dirty="0"/>
-          </a:p>
-          <a:p>
-            <a:pPr algn="l" indent="0" marL="0">
+              <a:t>Houses: </a:t>
+            </a:r>
+            <a:pPr algn="l" marL="342900" indent="-342900">
               <a:spcAft>
                 <a:spcPts val="800"/>
               </a:spcAft>
-              <a:buNone/>
+              <a:buSzPct val="100000"/>
+              <a:buChar char="•"/>
             </a:pPr>
             <a:r>
-              <a:rPr lang="en-US" sz="4000" b="1" dirty="0">
+              <a:rPr lang="en-US" sz="4000" dirty="0">
                 <a:solidFill>
                   <a:srgbClr val="111111"/>
                 </a:solidFill>
@@ -14736,16 +14964,20 @@
                 <a:ea typeface="Times New Roman" pitchFamily="34" charset="-122"/>
                 <a:cs typeface="Times New Roman" pitchFamily="34" charset="-120"/>
               </a:rPr>
-              <a:t>Soil protection: </a:t>
-            </a:r>
-            <a:pPr algn="l" indent="0" marL="0">
+              <a:t>Heated houses with thick walls and double windows.</a:t>
+            </a:r>
+            <a:endParaRPr lang="en-US" sz="4000" dirty="0"/>
+          </a:p>
+          <a:p>
+            <a:pPr algn="l" marL="342900" indent="-342900">
               <a:spcAft>
                 <a:spcPts val="800"/>
               </a:spcAft>
-              <a:buNone/>
+              <a:buSzPct val="100000"/>
+              <a:buChar char="•"/>
             </a:pPr>
             <a:r>
-              <a:rPr lang="en-US" sz="4000" dirty="0">
+              <a:rPr lang="en-US" sz="4000" b="1" dirty="0">
                 <a:solidFill>
                   <a:srgbClr val="111111"/>
                 </a:solidFill>
@@ -14753,7 +14985,25 @@
                 <a:ea typeface="Times New Roman" pitchFamily="34" charset="-122"/>
                 <a:cs typeface="Times New Roman" pitchFamily="34" charset="-120"/>
               </a:rPr>
-              <a:t>Shelterbelts of trees protect the soil from the wind.</a:t>
+              <a:t>Clothes: </a:t>
+            </a:r>
+            <a:pPr algn="l" marL="342900" indent="-342900">
+              <a:spcAft>
+                <a:spcPts val="800"/>
+              </a:spcAft>
+              <a:buSzPct val="100000"/>
+              <a:buChar char="•"/>
+            </a:pPr>
+            <a:r>
+              <a:rPr lang="en-US" sz="4000" dirty="0">
+                <a:solidFill>
+                  <a:srgbClr val="111111"/>
+                </a:solidFill>
+                <a:latin typeface="Times New Roman" pitchFamily="34" charset="0"/>
+                <a:ea typeface="Times New Roman" pitchFamily="34" charset="-122"/>
+                <a:cs typeface="Times New Roman" pitchFamily="34" charset="-120"/>
+              </a:rPr>
+              <a:t>Thick coats, gloves and boots in winter.</a:t>
             </a:r>
             <a:endParaRPr lang="en-US" sz="4000" dirty="0"/>
           </a:p>
@@ -15104,7 +15354,7 @@
                 <a:ea typeface="Calibri" pitchFamily="34" charset="-122"/>
                 <a:cs typeface="Calibri" pitchFamily="34" charset="-120"/>
               </a:rPr>
-              <a:t>FORMATIVE EVALUATION</a:t>
+              <a:t>BOARD SUMMARY</a:t>
             </a:r>
             <a:endParaRPr lang="en-US" sz="1400" dirty="0"/>
           </a:p>
@@ -15169,7 +15419,7 @@
                 <a:ea typeface="Times New Roman" pitchFamily="34" charset="-122"/>
                 <a:cs typeface="Times New Roman" pitchFamily="34" charset="-120"/>
               </a:rPr>
-              <a:t>Evaluation 1</a:t>
+              <a:t>2. Adaptations (continued)</a:t>
             </a:r>
             <a:endParaRPr lang="en-US" sz="3600" dirty="0"/>
           </a:p>
@@ -15196,14 +15446,15 @@
           <a:bodyPr wrap="square" lIns="0" tIns="0" rIns="0" bIns="0" rtlCol="0" anchor="t"/>
           <a:lstStyle/>
           <a:p>
-            <a:pPr algn="l" indent="0" marL="0">
+            <a:pPr algn="l" marL="342900" indent="-342900">
               <a:spcAft>
                 <a:spcPts val="800"/>
               </a:spcAft>
-              <a:buNone/>
+              <a:buSzPct val="100000"/>
+              <a:buChar char="•"/>
             </a:pPr>
             <a:r>
-              <a:rPr lang="en-US" sz="4000" dirty="0">
+              <a:rPr lang="en-US" sz="4000" b="1" dirty="0">
                 <a:solidFill>
                   <a:srgbClr val="111111"/>
                 </a:solidFill>
@@ -15211,7 +15462,25 @@
                 <a:ea typeface="Times New Roman" pitchFamily="34" charset="-122"/>
                 <a:cs typeface="Times New Roman" pitchFamily="34" charset="-120"/>
               </a:rPr>
-              <a:t>Give two problems of the temperate region.</a:t>
+              <a:t>Transport: </a:t>
+            </a:r>
+            <a:pPr algn="l" marL="342900" indent="-342900">
+              <a:spcAft>
+                <a:spcPts val="800"/>
+              </a:spcAft>
+              <a:buSzPct val="100000"/>
+              <a:buChar char="•"/>
+            </a:pPr>
+            <a:r>
+              <a:rPr lang="en-US" sz="4000" dirty="0">
+                <a:solidFill>
+                  <a:srgbClr val="111111"/>
+                </a:solidFill>
+                <a:latin typeface="Times New Roman" pitchFamily="34" charset="0"/>
+                <a:ea typeface="Times New Roman" pitchFamily="34" charset="-122"/>
+                <a:cs typeface="Times New Roman" pitchFamily="34" charset="-120"/>
+              </a:rPr>
+              <a:t>Snowploughs and salt on the roads.</a:t>
             </a:r>
             <a:endParaRPr lang="en-US" sz="4000" dirty="0"/>
           </a:p>
@@ -15323,15 +15592,117 @@
                 <a:ea typeface="Calibri" pitchFamily="34" charset="-122"/>
                 <a:cs typeface="Calibri" pitchFamily="34" charset="-120"/>
               </a:rPr>
-              <a:t>FORMATIVE EVALUATION</a:t>
+              <a:t>BOARD SUMMARY</a:t>
             </a:r>
             <a:endParaRPr lang="en-US" sz="1400" dirty="0"/>
+          </a:p>
+        </p:txBody>
+      </p:sp>
+      <p:sp>
+        <p:nvSpPr>
+          <p:cNvPr id="3" name="Text 1"/>
+          <p:cNvSpPr/>
+          <p:nvPr/>
+        </p:nvSpPr>
+        <p:spPr>
+          <a:xfrm>
+            <a:off x="365760" y="1005840"/>
+            <a:ext cx="11460175" cy="731520"/>
+          </a:xfrm>
+          <a:prstGeom prst="rect">
+            <a:avLst/>
+          </a:prstGeom>
+          <a:noFill/>
+          <a:ln/>
+        </p:spPr>
+        <p:txBody>
+          <a:bodyPr wrap="square" lIns="0" tIns="0" rIns="0" bIns="0" rtlCol="0" anchor="ctr">
+            <a:normAutofit/>
+          </a:bodyPr>
+          <a:lstStyle/>
+          <a:p>
+            <a:pPr algn="ctr" indent="0" marL="0">
+              <a:buNone/>
+            </a:pPr>
+            <a:r>
+              <a:rPr lang="en-US" sz="3600" b="1" dirty="0">
+                <a:solidFill>
+                  <a:srgbClr val="990011"/>
+                </a:solidFill>
+                <a:latin typeface="Times New Roman" pitchFamily="34" charset="0"/>
+                <a:ea typeface="Times New Roman" pitchFamily="34" charset="-122"/>
+                <a:cs typeface="Times New Roman" pitchFamily="34" charset="-120"/>
+              </a:rPr>
+              <a:t>2. Adaptations</a:t>
+            </a:r>
+            <a:endParaRPr lang="en-US" sz="3600" dirty="0"/>
+          </a:p>
+        </p:txBody>
+      </p:sp>
+      <p:sp>
+        <p:nvSpPr>
+          <p:cNvPr id="4" name="Text 2"/>
+          <p:cNvSpPr/>
+          <p:nvPr/>
+        </p:nvSpPr>
+        <p:spPr>
+          <a:xfrm>
+            <a:off x="365760" y="1783080"/>
+            <a:ext cx="4846320" cy="4617720"/>
+          </a:xfrm>
+          <a:prstGeom prst="rect">
+            <a:avLst/>
+          </a:prstGeom>
+          <a:noFill/>
+          <a:ln/>
+        </p:spPr>
+        <p:txBody>
+          <a:bodyPr wrap="square" lIns="0" tIns="0" rIns="0" bIns="0" rtlCol="0" anchor="t"/>
+          <a:lstStyle/>
+          <a:p>
+            <a:pPr algn="l" marL="342900" indent="-342900">
+              <a:spcAft>
+                <a:spcPts val="800"/>
+              </a:spcAft>
+              <a:buSzPct val="100000"/>
+              <a:buChar char="•"/>
+            </a:pPr>
+            <a:r>
+              <a:rPr lang="en-US" sz="3600" b="1" dirty="0">
+                <a:solidFill>
+                  <a:srgbClr val="111111"/>
+                </a:solidFill>
+                <a:latin typeface="Times New Roman" pitchFamily="34" charset="0"/>
+                <a:ea typeface="Times New Roman" pitchFamily="34" charset="-122"/>
+                <a:cs typeface="Times New Roman" pitchFamily="34" charset="-120"/>
+              </a:rPr>
+              <a:t>Greenhouses: </a:t>
+            </a:r>
+            <a:pPr algn="l" marL="342900" indent="-342900">
+              <a:spcAft>
+                <a:spcPts val="800"/>
+              </a:spcAft>
+              <a:buSzPct val="100000"/>
+              <a:buChar char="•"/>
+            </a:pPr>
+            <a:r>
+              <a:rPr lang="en-US" sz="3600" dirty="0">
+                <a:solidFill>
+                  <a:srgbClr val="111111"/>
+                </a:solidFill>
+                <a:latin typeface="Times New Roman" pitchFamily="34" charset="0"/>
+                <a:ea typeface="Times New Roman" pitchFamily="34" charset="-122"/>
+                <a:cs typeface="Times New Roman" pitchFamily="34" charset="-120"/>
+              </a:rPr>
+              <a:t>Vegetables grow in warm glasshouses.</a:t>
+            </a:r>
+            <a:endParaRPr lang="en-US" sz="3600" dirty="0"/>
           </a:p>
         </p:txBody>
       </p:sp>
       <p:pic>
         <p:nvPicPr>
-          <p:cNvPr id="3" name="Image 0" descr="/home/claude/f4/img/minesec_sheet.png">    </p:cNvPr>
+          <p:cNvPr id="5" name="Image 0" descr="/home/claude/f4/img/v2/f2t_greenhouse.jpg">    </p:cNvPr>
           <p:cNvPicPr>
             <a:picLocks noChangeAspect="1"/>
           </p:cNvPicPr>
@@ -15345,8 +15716,8 @@
         </p:blipFill>
         <p:spPr>
           <a:xfrm>
-            <a:off x="0" y="658368"/>
-            <a:ext cx="5120640" cy="5833872"/>
+            <a:off x="5349240" y="2069407"/>
+            <a:ext cx="6659575" cy="3697594"/>
           </a:xfrm>
           <a:prstGeom prst="rect">
             <a:avLst/>
@@ -15355,14 +15726,14 @@
       </p:pic>
       <p:sp>
         <p:nvSpPr>
-          <p:cNvPr id="4" name="Text 1"/>
+          <p:cNvPr id="6" name="Text 3"/>
           <p:cNvSpPr/>
           <p:nvPr/>
         </p:nvSpPr>
         <p:spPr>
           <a:xfrm>
-            <a:off x="5349240" y="1005840"/>
-            <a:ext cx="6522415" cy="731520"/>
+            <a:off x="5349240" y="6089904"/>
+            <a:ext cx="6659575" cy="347472"/>
           </a:xfrm>
           <a:prstGeom prst="rect">
             <a:avLst/>
@@ -15371,68 +15742,24 @@
           <a:ln/>
         </p:spPr>
         <p:txBody>
-          <a:bodyPr wrap="square" lIns="0" tIns="0" rIns="0" bIns="0" rtlCol="0" anchor="ctr">
-            <a:normAutofit/>
-          </a:bodyPr>
+          <a:bodyPr wrap="square" lIns="0" tIns="0" rIns="0" bIns="0" rtlCol="0" anchor="ctr"/>
           <a:lstStyle/>
           <a:p>
             <a:pPr algn="ctr" indent="0" marL="0">
               <a:buNone/>
             </a:pPr>
             <a:r>
-              <a:rPr lang="en-US" sz="3600" b="1" dirty="0">
-                <a:solidFill>
-                  <a:srgbClr val="990011"/>
+              <a:rPr lang="en-US" sz="1600" i="1" dirty="0">
+                <a:solidFill>
+                  <a:srgbClr val="555555"/>
                 </a:solidFill>
                 <a:latin typeface="Times New Roman" pitchFamily="34" charset="0"/>
                 <a:ea typeface="Times New Roman" pitchFamily="34" charset="-122"/>
                 <a:cs typeface="Times New Roman" pitchFamily="34" charset="-120"/>
               </a:rPr>
-              <a:t>Expected Answer</a:t>
-            </a:r>
-            <a:endParaRPr lang="en-US" sz="3600" dirty="0"/>
-          </a:p>
-        </p:txBody>
-      </p:sp>
-      <p:sp>
-        <p:nvSpPr>
-          <p:cNvPr id="5" name="Text 2"/>
-          <p:cNvSpPr/>
-          <p:nvPr/>
-        </p:nvSpPr>
-        <p:spPr>
-          <a:xfrm>
-            <a:off x="5349240" y="1783080"/>
-            <a:ext cx="6522415" cy="4663440"/>
-          </a:xfrm>
-          <a:prstGeom prst="rect">
-            <a:avLst/>
-          </a:prstGeom>
-          <a:noFill/>
-          <a:ln/>
-        </p:spPr>
-        <p:txBody>
-          <a:bodyPr wrap="square" lIns="0" tIns="0" rIns="0" bIns="0" rtlCol="0" anchor="t"/>
-          <a:lstStyle/>
-          <a:p>
-            <a:pPr algn="l" indent="0" marL="0">
-              <a:spcAft>
-                <a:spcPts val="800"/>
-              </a:spcAft>
-              <a:buNone/>
-            </a:pPr>
-            <a:r>
-              <a:rPr lang="en-US" sz="4000" dirty="0">
-                <a:solidFill>
-                  <a:srgbClr val="111111"/>
-                </a:solidFill>
-                <a:latin typeface="Times New Roman" pitchFamily="34" charset="0"/>
-                <a:ea typeface="Times New Roman" pitchFamily="34" charset="-122"/>
-                <a:cs typeface="Times New Roman" pitchFamily="34" charset="-120"/>
-              </a:rPr>
-              <a:t>Cold winters with snow; soil erosion by wind.</a:t>
-            </a:r>
-            <a:endParaRPr lang="en-US" sz="4000" dirty="0"/>
+              <a:t>Illustration: a greenhouse</a:t>
+            </a:r>
+            <a:endParaRPr lang="en-US" sz="1600" dirty="0"/>
           </a:p>
         </p:txBody>
       </p:sp>
@@ -15542,15 +15869,117 @@
                 <a:ea typeface="Calibri" pitchFamily="34" charset="-122"/>
                 <a:cs typeface="Calibri" pitchFamily="34" charset="-120"/>
               </a:rPr>
-              <a:t>FORMATIVE EVALUATION</a:t>
+              <a:t>BOARD SUMMARY</a:t>
             </a:r>
             <a:endParaRPr lang="en-US" sz="1400" dirty="0"/>
+          </a:p>
+        </p:txBody>
+      </p:sp>
+      <p:sp>
+        <p:nvSpPr>
+          <p:cNvPr id="3" name="Text 1"/>
+          <p:cNvSpPr/>
+          <p:nvPr/>
+        </p:nvSpPr>
+        <p:spPr>
+          <a:xfrm>
+            <a:off x="365760" y="1005840"/>
+            <a:ext cx="11460175" cy="731520"/>
+          </a:xfrm>
+          <a:prstGeom prst="rect">
+            <a:avLst/>
+          </a:prstGeom>
+          <a:noFill/>
+          <a:ln/>
+        </p:spPr>
+        <p:txBody>
+          <a:bodyPr wrap="square" lIns="0" tIns="0" rIns="0" bIns="0" rtlCol="0" anchor="ctr">
+            <a:normAutofit/>
+          </a:bodyPr>
+          <a:lstStyle/>
+          <a:p>
+            <a:pPr algn="ctr" indent="0" marL="0">
+              <a:buNone/>
+            </a:pPr>
+            <a:r>
+              <a:rPr lang="en-US" sz="3600" b="1" dirty="0">
+                <a:solidFill>
+                  <a:srgbClr val="990011"/>
+                </a:solidFill>
+                <a:latin typeface="Times New Roman" pitchFamily="34" charset="0"/>
+                <a:ea typeface="Times New Roman" pitchFamily="34" charset="-122"/>
+                <a:cs typeface="Times New Roman" pitchFamily="34" charset="-120"/>
+              </a:rPr>
+              <a:t>2. Adaptations</a:t>
+            </a:r>
+            <a:endParaRPr lang="en-US" sz="3600" dirty="0"/>
+          </a:p>
+        </p:txBody>
+      </p:sp>
+      <p:sp>
+        <p:nvSpPr>
+          <p:cNvPr id="4" name="Text 2"/>
+          <p:cNvSpPr/>
+          <p:nvPr/>
+        </p:nvSpPr>
+        <p:spPr>
+          <a:xfrm>
+            <a:off x="365760" y="1783080"/>
+            <a:ext cx="4846320" cy="4617720"/>
+          </a:xfrm>
+          <a:prstGeom prst="rect">
+            <a:avLst/>
+          </a:prstGeom>
+          <a:noFill/>
+          <a:ln/>
+        </p:spPr>
+        <p:txBody>
+          <a:bodyPr wrap="square" lIns="0" tIns="0" rIns="0" bIns="0" rtlCol="0" anchor="t"/>
+          <a:lstStyle/>
+          <a:p>
+            <a:pPr algn="l" marL="342900" indent="-342900">
+              <a:spcAft>
+                <a:spcPts val="800"/>
+              </a:spcAft>
+              <a:buSzPct val="100000"/>
+              <a:buChar char="•"/>
+            </a:pPr>
+            <a:r>
+              <a:rPr lang="en-US" sz="3600" b="1" dirty="0">
+                <a:solidFill>
+                  <a:srgbClr val="111111"/>
+                </a:solidFill>
+                <a:latin typeface="Times New Roman" pitchFamily="34" charset="0"/>
+                <a:ea typeface="Times New Roman" pitchFamily="34" charset="-122"/>
+                <a:cs typeface="Times New Roman" pitchFamily="34" charset="-120"/>
+              </a:rPr>
+              <a:t>Shelter belts and irrigation: </a:t>
+            </a:r>
+            <a:pPr algn="l" marL="342900" indent="-342900">
+              <a:spcAft>
+                <a:spcPts val="800"/>
+              </a:spcAft>
+              <a:buSzPct val="100000"/>
+              <a:buChar char="•"/>
+            </a:pPr>
+            <a:r>
+              <a:rPr lang="en-US" sz="3600" dirty="0">
+                <a:solidFill>
+                  <a:srgbClr val="111111"/>
+                </a:solidFill>
+                <a:latin typeface="Times New Roman" pitchFamily="34" charset="0"/>
+                <a:ea typeface="Times New Roman" pitchFamily="34" charset="-122"/>
+                <a:cs typeface="Times New Roman" pitchFamily="34" charset="-120"/>
+              </a:rPr>
+              <a:t>Trees stop the wind, and irrigation helps in summer.</a:t>
+            </a:r>
+            <a:endParaRPr lang="en-US" sz="3600" dirty="0"/>
           </a:p>
         </p:txBody>
       </p:sp>
       <p:pic>
         <p:nvPicPr>
-          <p:cNvPr id="3" name="Image 0" descr="/home/claude/f4/img/minesec_sheet.png">    </p:cNvPr>
+          <p:cNvPr id="5" name="Image 0" descr="/home/claude/f4/img/v2/f2t_shelterbelt.jpg">    </p:cNvPr>
           <p:cNvPicPr>
             <a:picLocks noChangeAspect="1"/>
           </p:cNvPicPr>
@@ -15564,8 +15993,8 @@
         </p:blipFill>
         <p:spPr>
           <a:xfrm>
-            <a:off x="0" y="658368"/>
-            <a:ext cx="5120640" cy="5833872"/>
+            <a:off x="5349240" y="2071212"/>
+            <a:ext cx="6659575" cy="3693983"/>
           </a:xfrm>
           <a:prstGeom prst="rect">
             <a:avLst/>
@@ -15574,14 +16003,14 @@
       </p:pic>
       <p:sp>
         <p:nvSpPr>
-          <p:cNvPr id="4" name="Text 1"/>
+          <p:cNvPr id="6" name="Text 3"/>
           <p:cNvSpPr/>
           <p:nvPr/>
         </p:nvSpPr>
         <p:spPr>
           <a:xfrm>
-            <a:off x="5349240" y="1005840"/>
-            <a:ext cx="6522415" cy="731520"/>
+            <a:off x="5349240" y="6089904"/>
+            <a:ext cx="6659575" cy="347472"/>
           </a:xfrm>
           <a:prstGeom prst="rect">
             <a:avLst/>
@@ -15590,68 +16019,24 @@
           <a:ln/>
         </p:spPr>
         <p:txBody>
-          <a:bodyPr wrap="square" lIns="0" tIns="0" rIns="0" bIns="0" rtlCol="0" anchor="ctr">
-            <a:normAutofit/>
-          </a:bodyPr>
+          <a:bodyPr wrap="square" lIns="0" tIns="0" rIns="0" bIns="0" rtlCol="0" anchor="ctr"/>
           <a:lstStyle/>
           <a:p>
             <a:pPr algn="ctr" indent="0" marL="0">
               <a:buNone/>
             </a:pPr>
             <a:r>
-              <a:rPr lang="en-US" sz="3600" b="1" dirty="0">
-                <a:solidFill>
-                  <a:srgbClr val="990011"/>
+              <a:rPr lang="en-US" sz="1600" i="1" dirty="0">
+                <a:solidFill>
+                  <a:srgbClr val="555555"/>
                 </a:solidFill>
                 <a:latin typeface="Times New Roman" pitchFamily="34" charset="0"/>
                 <a:ea typeface="Times New Roman" pitchFamily="34" charset="-122"/>
                 <a:cs typeface="Times New Roman" pitchFamily="34" charset="-120"/>
               </a:rPr>
-              <a:t>Evaluation 2</a:t>
-            </a:r>
-            <a:endParaRPr lang="en-US" sz="3600" dirty="0"/>
-          </a:p>
-        </p:txBody>
-      </p:sp>
-      <p:sp>
-        <p:nvSpPr>
-          <p:cNvPr id="5" name="Text 2"/>
-          <p:cNvSpPr/>
-          <p:nvPr/>
-        </p:nvSpPr>
-        <p:spPr>
-          <a:xfrm>
-            <a:off x="5349240" y="1783080"/>
-            <a:ext cx="6522415" cy="4663440"/>
-          </a:xfrm>
-          <a:prstGeom prst="rect">
-            <a:avLst/>
-          </a:prstGeom>
-          <a:noFill/>
-          <a:ln/>
-        </p:spPr>
-        <p:txBody>
-          <a:bodyPr wrap="square" lIns="0" tIns="0" rIns="0" bIns="0" rtlCol="0" anchor="t"/>
-          <a:lstStyle/>
-          <a:p>
-            <a:pPr algn="l" indent="0" marL="0">
-              <a:spcAft>
-                <a:spcPts val="800"/>
-              </a:spcAft>
-              <a:buNone/>
-            </a:pPr>
-            <a:r>
-              <a:rPr lang="en-US" sz="4000" dirty="0">
-                <a:solidFill>
-                  <a:srgbClr val="111111"/>
-                </a:solidFill>
-                <a:latin typeface="Times New Roman" pitchFamily="34" charset="0"/>
-                <a:ea typeface="Times New Roman" pitchFamily="34" charset="-122"/>
-                <a:cs typeface="Times New Roman" pitchFamily="34" charset="-120"/>
-              </a:rPr>
-              <a:t>How can farmers grow vegetables in winter?</a:t>
-            </a:r>
-            <a:endParaRPr lang="en-US" sz="4000" dirty="0"/>
+              <a:t>Illustration: a shelter belt</a:t>
+            </a:r>
+            <a:endParaRPr lang="en-US" sz="1600" dirty="0"/>
           </a:p>
         </p:txBody>
       </p:sp>
@@ -15826,7 +16211,7 @@
                 <a:ea typeface="Times New Roman" pitchFamily="34" charset="-122"/>
                 <a:cs typeface="Times New Roman" pitchFamily="34" charset="-120"/>
               </a:rPr>
-              <a:t>Expected Answer</a:t>
+              <a:t>Evaluation 1</a:t>
             </a:r>
             <a:endParaRPr lang="en-US" sz="3600" dirty="0"/>
           </a:p>
@@ -15868,7 +16253,7 @@
                 <a:ea typeface="Times New Roman" pitchFamily="34" charset="-122"/>
                 <a:cs typeface="Times New Roman" pitchFamily="34" charset="-120"/>
               </a:rPr>
-              <a:t>In greenhouses.</a:t>
+              <a:t>Give two problems of the temperate region.</a:t>
             </a:r>
             <a:endParaRPr lang="en-US" sz="4000" dirty="0"/>
           </a:p>
@@ -15980,7 +16365,7 @@
                 <a:ea typeface="Calibri" pitchFamily="34" charset="-122"/>
                 <a:cs typeface="Calibri" pitchFamily="34" charset="-120"/>
               </a:rPr>
-              <a:t>REMEDIATION</a:t>
+              <a:t>FORMATIVE EVALUATION</a:t>
             </a:r>
             <a:endParaRPr lang="en-US" sz="1400" dirty="0"/>
           </a:p>
@@ -16003,7 +16388,7 @@
         <p:spPr>
           <a:xfrm>
             <a:off x="0" y="658368"/>
-            <a:ext cx="2468880" cy="5833872"/>
+            <a:ext cx="5120640" cy="5833872"/>
           </a:xfrm>
           <a:prstGeom prst="rect">
             <a:avLst/>
@@ -16018,8 +16403,8 @@
         </p:nvSpPr>
         <p:spPr>
           <a:xfrm>
-            <a:off x="2697480" y="1005840"/>
-            <a:ext cx="9174175" cy="731520"/>
+            <a:off x="5349240" y="1005840"/>
+            <a:ext cx="6522415" cy="731520"/>
           </a:xfrm>
           <a:prstGeom prst="rect">
             <a:avLst/>
@@ -16045,7 +16430,7 @@
                 <a:ea typeface="Times New Roman" pitchFamily="34" charset="-122"/>
                 <a:cs typeface="Times New Roman" pitchFamily="34" charset="-120"/>
               </a:rPr>
-              <a:t>Remediation</a:t>
+              <a:t>Expected Answer</a:t>
             </a:r>
             <a:endParaRPr lang="en-US" sz="3600" dirty="0"/>
           </a:p>
@@ -16059,8 +16444,8 @@
         </p:nvSpPr>
         <p:spPr>
           <a:xfrm>
-            <a:off x="2697480" y="1783080"/>
-            <a:ext cx="9174175" cy="4663440"/>
+            <a:off x="5349240" y="1783080"/>
+            <a:ext cx="6522415" cy="4663440"/>
           </a:xfrm>
           <a:prstGeom prst="rect">
             <a:avLst/>
@@ -16079,7 +16464,7 @@
               <a:buNone/>
             </a:pPr>
             <a:r>
-              <a:rPr lang="en-US" sz="4000" b="1" dirty="0">
+              <a:rPr lang="en-US" sz="4000" dirty="0">
                 <a:solidFill>
                   <a:srgbClr val="111111"/>
                 </a:solidFill>
@@ -16087,73 +16472,7 @@
                 <a:ea typeface="Times New Roman" pitchFamily="34" charset="-122"/>
                 <a:cs typeface="Times New Roman" pitchFamily="34" charset="-120"/>
               </a:rPr>
-              <a:t>Fill in the blanks:</a:t>
-            </a:r>
-            <a:endParaRPr lang="en-US" sz="4000" dirty="0"/>
-          </a:p>
-          <a:p>
-            <a:pPr algn="l" marL="342900" indent="-342900">
-              <a:spcAft>
-                <a:spcPts val="800"/>
-              </a:spcAft>
-              <a:buSzPct val="100000"/>
-              <a:buFont typeface="+mj-lt"/>
-              <a:buAutoNum type="arabicPeriod" startAt="1"/>
-            </a:pPr>
-            <a:r>
-              <a:rPr lang="en-US" sz="4000" dirty="0">
-                <a:solidFill>
-                  <a:srgbClr val="111111"/>
-                </a:solidFill>
-                <a:latin typeface="Times New Roman" pitchFamily="34" charset="0"/>
-                <a:ea typeface="Times New Roman" pitchFamily="34" charset="-122"/>
-                <a:cs typeface="Times New Roman" pitchFamily="34" charset="-120"/>
-              </a:rPr>
-              <a:t>A glass house for plants is a ______.</a:t>
-            </a:r>
-            <a:endParaRPr lang="en-US" sz="4000" dirty="0"/>
-          </a:p>
-          <a:p>
-            <a:pPr algn="l" marL="342900" indent="-342900">
-              <a:spcAft>
-                <a:spcPts val="800"/>
-              </a:spcAft>
-              <a:buSzPct val="100000"/>
-              <a:buFont typeface="+mj-lt"/>
-              <a:buAutoNum type="arabicPeriod" startAt="1"/>
-            </a:pPr>
-            <a:r>
-              <a:rPr lang="en-US" sz="4000" dirty="0">
-                <a:solidFill>
-                  <a:srgbClr val="111111"/>
-                </a:solidFill>
-                <a:latin typeface="Times New Roman" pitchFamily="34" charset="0"/>
-                <a:ea typeface="Times New Roman" pitchFamily="34" charset="-122"/>
-                <a:cs typeface="Times New Roman" pitchFamily="34" charset="-120"/>
-              </a:rPr>
-              <a:t>A line of trees that stops the wind is a ______.</a:t>
-            </a:r>
-            <a:endParaRPr lang="en-US" sz="4000" dirty="0"/>
-          </a:p>
-          <a:p>
-            <a:pPr algn="l" marL="342900" indent="-342900">
-              <a:spcAft>
-                <a:spcPts val="800"/>
-              </a:spcAft>
-              <a:buSzPct val="100000"/>
-              <a:buFont typeface="+mj-lt"/>
-              <a:buAutoNum type="arabicPeriod" startAt="1"/>
-            </a:pPr>
-            <a:r>
-              <a:rPr lang="en-US" sz="4000" dirty="0">
-                <a:solidFill>
-                  <a:srgbClr val="111111"/>
-                </a:solidFill>
-                <a:latin typeface="Times New Roman" pitchFamily="34" charset="0"/>
-                <a:ea typeface="Times New Roman" pitchFamily="34" charset="-122"/>
-                <a:cs typeface="Times New Roman" pitchFamily="34" charset="-120"/>
-              </a:rPr>
-              <a:t>The 1930s disaster in the USA was the Dust ______.</a:t>
+              <a:t>Cold winters with snow; soil erosion by wind.</a:t>
             </a:r>
             <a:endParaRPr lang="en-US" sz="4000" dirty="0"/>
           </a:p>
@@ -16265,7 +16584,7 @@
                 <a:ea typeface="Calibri" pitchFamily="34" charset="-122"/>
                 <a:cs typeface="Calibri" pitchFamily="34" charset="-120"/>
               </a:rPr>
-              <a:t>HOMEWORK</a:t>
+              <a:t>FORMATIVE EVALUATION</a:t>
             </a:r>
             <a:endParaRPr lang="en-US" sz="1400" dirty="0"/>
           </a:p>
@@ -16330,7 +16649,7 @@
                 <a:ea typeface="Times New Roman" pitchFamily="34" charset="-122"/>
                 <a:cs typeface="Times New Roman" pitchFamily="34" charset="-120"/>
               </a:rPr>
-              <a:t>Homework</a:t>
+              <a:t>Evaluation 2</a:t>
             </a:r>
             <a:endParaRPr lang="en-US" sz="3600" dirty="0"/>
           </a:p>
@@ -16372,7 +16691,7 @@
                 <a:ea typeface="Times New Roman" pitchFamily="34" charset="-122"/>
                 <a:cs typeface="Times New Roman" pitchFamily="34" charset="-120"/>
               </a:rPr>
-              <a:t>List five jobs done by people in your family or neighbourhood (for example farmer, trader, teacher, mechanic, tailor).</a:t>
+              <a:t>How can farmers grow vegetables in winter?</a:t>
             </a:r>
             <a:endParaRPr lang="en-US" sz="4000" dirty="0"/>
           </a:p>
@@ -16484,7 +16803,7 @@
                 <a:ea typeface="Calibri" pitchFamily="34" charset="-122"/>
                 <a:cs typeface="Calibri" pitchFamily="34" charset="-120"/>
               </a:rPr>
-              <a:t>NEXT LESSON</a:t>
+              <a:t>FORMATIVE EVALUATION</a:t>
             </a:r>
             <a:endParaRPr lang="en-US" sz="1400" dirty="0"/>
           </a:p>
@@ -16549,7 +16868,7 @@
                 <a:ea typeface="Times New Roman" pitchFamily="34" charset="-122"/>
                 <a:cs typeface="Times New Roman" pitchFamily="34" charset="-120"/>
               </a:rPr>
-              <a:t>Next Lesson</a:t>
+              <a:t>Expected Answer</a:t>
             </a:r>
             <a:endParaRPr lang="en-US" sz="3600" dirty="0"/>
           </a:p>
@@ -16573,17 +16892,17 @@
           <a:ln/>
         </p:spPr>
         <p:txBody>
-          <a:bodyPr wrap="square" lIns="0" tIns="0" rIns="0" bIns="0" rtlCol="0" anchor="ctr"/>
-          <a:lstStyle/>
-          <a:p>
-            <a:pPr algn="ctr" indent="0" marL="0">
+          <a:bodyPr wrap="square" lIns="0" tIns="0" rIns="0" bIns="0" rtlCol="0" anchor="t"/>
+          <a:lstStyle/>
+          <a:p>
+            <a:pPr algn="l" indent="0" marL="0">
               <a:spcAft>
                 <a:spcPts val="800"/>
               </a:spcAft>
               <a:buNone/>
             </a:pPr>
             <a:r>
-              <a:rPr lang="en-US" sz="4000" b="1" dirty="0">
+              <a:rPr lang="en-US" sz="4000" dirty="0">
                 <a:solidFill>
                   <a:srgbClr val="111111"/>
                 </a:solidFill>
@@ -16591,27 +16910,7 @@
                 <a:ea typeface="Times New Roman" pitchFamily="34" charset="-122"/>
                 <a:cs typeface="Times New Roman" pitchFamily="34" charset="-120"/>
               </a:rPr>
-              <a:t>Our next lesson will be on:</a:t>
-            </a:r>
-            <a:endParaRPr lang="en-US" sz="4000" dirty="0"/>
-          </a:p>
-          <a:p>
-            <a:pPr algn="ctr" indent="0" marL="0">
-              <a:spcAft>
-                <a:spcPts val="800"/>
-              </a:spcAft>
-              <a:buNone/>
-            </a:pPr>
-            <a:r>
-              <a:rPr lang="en-US" sz="4000" b="1" dirty="0">
-                <a:solidFill>
-                  <a:srgbClr val="990011"/>
-                </a:solidFill>
-                <a:latin typeface="Times New Roman" pitchFamily="34" charset="0"/>
-                <a:ea typeface="Times New Roman" pitchFamily="34" charset="-122"/>
-                <a:cs typeface="Times New Roman" pitchFamily="34" charset="-120"/>
-              </a:rPr>
-              <a:t>Lesson 5 (Part 1): The Sectors of the Economy: Introduction, Definitions and Key Concepts</a:t>
+              <a:t>In greenhouses.</a:t>
             </a:r>
             <a:endParaRPr lang="en-US" sz="4000" dirty="0"/>
           </a:p>
@@ -16723,6 +17022,968 @@
                 <a:ea typeface="Calibri" pitchFamily="34" charset="-122"/>
                 <a:cs typeface="Calibri" pitchFamily="34" charset="-120"/>
               </a:rPr>
+              <a:t>REMEDIATION</a:t>
+            </a:r>
+            <a:endParaRPr lang="en-US" sz="1400" dirty="0"/>
+          </a:p>
+        </p:txBody>
+      </p:sp>
+      <p:pic>
+        <p:nvPicPr>
+          <p:cNvPr id="3" name="Image 0" descr="/home/claude/f4/img/minesec_sheet.png">    </p:cNvPr>
+          <p:cNvPicPr>
+            <a:picLocks noChangeAspect="1"/>
+          </p:cNvPicPr>
+          <p:nvPr/>
+        </p:nvPicPr>
+        <p:blipFill>
+          <a:blip r:embed="rId1"/>
+          <a:stretch>
+            <a:fillRect/>
+          </a:stretch>
+        </p:blipFill>
+        <p:spPr>
+          <a:xfrm>
+            <a:off x="0" y="658368"/>
+            <a:ext cx="2468880" cy="5833872"/>
+          </a:xfrm>
+          <a:prstGeom prst="rect">
+            <a:avLst/>
+          </a:prstGeom>
+        </p:spPr>
+      </p:pic>
+      <p:sp>
+        <p:nvSpPr>
+          <p:cNvPr id="4" name="Text 1"/>
+          <p:cNvSpPr/>
+          <p:nvPr/>
+        </p:nvSpPr>
+        <p:spPr>
+          <a:xfrm>
+            <a:off x="2697480" y="1005840"/>
+            <a:ext cx="9174175" cy="731520"/>
+          </a:xfrm>
+          <a:prstGeom prst="rect">
+            <a:avLst/>
+          </a:prstGeom>
+          <a:noFill/>
+          <a:ln/>
+        </p:spPr>
+        <p:txBody>
+          <a:bodyPr wrap="square" lIns="0" tIns="0" rIns="0" bIns="0" rtlCol="0" anchor="ctr">
+            <a:normAutofit/>
+          </a:bodyPr>
+          <a:lstStyle/>
+          <a:p>
+            <a:pPr algn="ctr" indent="0" marL="0">
+              <a:buNone/>
+            </a:pPr>
+            <a:r>
+              <a:rPr lang="en-US" sz="3600" b="1" dirty="0">
+                <a:solidFill>
+                  <a:srgbClr val="990011"/>
+                </a:solidFill>
+                <a:latin typeface="Times New Roman" pitchFamily="34" charset="0"/>
+                <a:ea typeface="Times New Roman" pitchFamily="34" charset="-122"/>
+                <a:cs typeface="Times New Roman" pitchFamily="34" charset="-120"/>
+              </a:rPr>
+              <a:t>Remediation</a:t>
+            </a:r>
+            <a:endParaRPr lang="en-US" sz="3600" dirty="0"/>
+          </a:p>
+        </p:txBody>
+      </p:sp>
+      <p:sp>
+        <p:nvSpPr>
+          <p:cNvPr id="5" name="Text 2"/>
+          <p:cNvSpPr/>
+          <p:nvPr/>
+        </p:nvSpPr>
+        <p:spPr>
+          <a:xfrm>
+            <a:off x="2697480" y="1783080"/>
+            <a:ext cx="9174175" cy="4663440"/>
+          </a:xfrm>
+          <a:prstGeom prst="rect">
+            <a:avLst/>
+          </a:prstGeom>
+          <a:noFill/>
+          <a:ln/>
+        </p:spPr>
+        <p:txBody>
+          <a:bodyPr wrap="square" lIns="0" tIns="0" rIns="0" bIns="0" rtlCol="0" anchor="t"/>
+          <a:lstStyle/>
+          <a:p>
+            <a:pPr algn="l" indent="0" marL="0">
+              <a:spcAft>
+                <a:spcPts val="800"/>
+              </a:spcAft>
+              <a:buNone/>
+            </a:pPr>
+            <a:r>
+              <a:rPr lang="en-US" sz="4000" b="1" dirty="0">
+                <a:solidFill>
+                  <a:srgbClr val="111111"/>
+                </a:solidFill>
+                <a:latin typeface="Times New Roman" pitchFamily="34" charset="0"/>
+                <a:ea typeface="Times New Roman" pitchFamily="34" charset="-122"/>
+                <a:cs typeface="Times New Roman" pitchFamily="34" charset="-120"/>
+              </a:rPr>
+              <a:t>Fill in the blanks:</a:t>
+            </a:r>
+            <a:endParaRPr lang="en-US" sz="4000" dirty="0"/>
+          </a:p>
+          <a:p>
+            <a:pPr algn="l" marL="342900" indent="-342900">
+              <a:spcAft>
+                <a:spcPts val="800"/>
+              </a:spcAft>
+              <a:buSzPct val="100000"/>
+              <a:buFont typeface="+mj-lt"/>
+              <a:buAutoNum type="arabicPeriod" startAt="1"/>
+            </a:pPr>
+            <a:r>
+              <a:rPr lang="en-US" sz="4000" dirty="0">
+                <a:solidFill>
+                  <a:srgbClr val="111111"/>
+                </a:solidFill>
+                <a:latin typeface="Times New Roman" pitchFamily="34" charset="0"/>
+                <a:ea typeface="Times New Roman" pitchFamily="34" charset="-122"/>
+                <a:cs typeface="Times New Roman" pitchFamily="34" charset="-120"/>
+              </a:rPr>
+              <a:t>A glass house for plants is a ______.</a:t>
+            </a:r>
+            <a:endParaRPr lang="en-US" sz="4000" dirty="0"/>
+          </a:p>
+          <a:p>
+            <a:pPr algn="l" marL="342900" indent="-342900">
+              <a:spcAft>
+                <a:spcPts val="800"/>
+              </a:spcAft>
+              <a:buSzPct val="100000"/>
+              <a:buFont typeface="+mj-lt"/>
+              <a:buAutoNum type="arabicPeriod" startAt="1"/>
+            </a:pPr>
+            <a:r>
+              <a:rPr lang="en-US" sz="4000" dirty="0">
+                <a:solidFill>
+                  <a:srgbClr val="111111"/>
+                </a:solidFill>
+                <a:latin typeface="Times New Roman" pitchFamily="34" charset="0"/>
+                <a:ea typeface="Times New Roman" pitchFamily="34" charset="-122"/>
+                <a:cs typeface="Times New Roman" pitchFamily="34" charset="-120"/>
+              </a:rPr>
+              <a:t>A line of trees that stops the wind is a ______.</a:t>
+            </a:r>
+            <a:endParaRPr lang="en-US" sz="4000" dirty="0"/>
+          </a:p>
+          <a:p>
+            <a:pPr algn="l" marL="342900" indent="-342900">
+              <a:spcAft>
+                <a:spcPts val="800"/>
+              </a:spcAft>
+              <a:buSzPct val="100000"/>
+              <a:buFont typeface="+mj-lt"/>
+              <a:buAutoNum type="arabicPeriod" startAt="1"/>
+            </a:pPr>
+            <a:r>
+              <a:rPr lang="en-US" sz="4000" dirty="0">
+                <a:solidFill>
+                  <a:srgbClr val="111111"/>
+                </a:solidFill>
+                <a:latin typeface="Times New Roman" pitchFamily="34" charset="0"/>
+                <a:ea typeface="Times New Roman" pitchFamily="34" charset="-122"/>
+                <a:cs typeface="Times New Roman" pitchFamily="34" charset="-120"/>
+              </a:rPr>
+              <a:t>The 1930s disaster in the USA was the Dust ______.</a:t>
+            </a:r>
+            <a:endParaRPr lang="en-US" sz="4000" dirty="0"/>
+          </a:p>
+        </p:txBody>
+      </p:sp>
+      <p:sp>
+        <p:nvSpPr>
+          <p:cNvPr id="25" name="Slide Number Placeholder 0"/>
+          <p:cNvSpPr>
+            <a:spLocks noGrp="1"/>
+          </p:cNvSpPr>
+          <p:nvPr>
+            <p:ph type="sldNum" sz="quarter" idx="4294967295"/>
+          </p:nvPr>
+        </p:nvSpPr>
+        <p:spPr>
+          <a:xfrm>
+            <a:off x="27432" y="91440"/>
+            <a:ext cx="585216" cy="475488"/>
+          </a:xfrm>
+          <a:prstGeom prst="rect">
+            <a:avLst/>
+          </a:prstGeom>
+          <a:extLst>
+            <a:ext uri="{C572A759-6A51-4108-AA02-DFA0A04FC94B}">
+              <ma14:wrappingTextBoxFlag xmlns:ma14="http://schemas.microsoft.com/office/mac/drawingml/2011/main" val="0"/>
+            </a:ext>
+          </a:extLst>
+        </p:spPr>
+        <p:txBody>
+          <a:bodyPr/>
+          <a:lstStyle>
+            <a:lvl1pPr>
+              <a:defRPr sz="2000">
+                <a:solidFill>
+                  <a:srgbClr val="FFFFFF"/>
+                </a:solidFill>
+                <a:latin typeface="Calibri"/>
+                <a:ea typeface="Calibri"/>
+                <a:cs typeface="Calibri"/>
+              </a:defRPr>
+            </a:lvl1pPr>
+          </a:lstStyle>
+          <a:p>
+            <a:pPr algn="ctr"/>
+            <a:fld id="{F7021451-1387-4CA6-816F-3879F97B5CBC}" type="slidenum">
+              <a:rPr b="1" lang="en-US"/>
+              <a:t>47</a:t>
+            </a:fld>
+            <a:endParaRPr lang="en-US"/>
+          </a:p>
+        </p:txBody>
+      </p:sp>
+    </p:spTree>
+  </p:cSld>
+  <p:clrMapOvr>
+    <a:masterClrMapping/>
+  </p:clrMapOvr>
+</p:sld>
+</file>
+
+<file path=ppt/slides/slide48.xml><?xml version="1.0" encoding="utf-8"?>
+<p:sld xmlns:a="http://schemas.openxmlformats.org/drawingml/2006/main" xmlns:r="http://schemas.openxmlformats.org/officeDocument/2006/relationships" xmlns:p="http://schemas.openxmlformats.org/presentationml/2006/main">
+  <p:cSld name="Slide 48">
+    <p:spTree>
+      <p:nvGrpSpPr>
+        <p:cNvPr id="1" name=""/>
+        <p:cNvGrpSpPr/>
+        <p:nvPr/>
+      </p:nvGrpSpPr>
+      <p:grpSpPr>
+        <a:xfrm>
+          <a:off x="0" y="0"/>
+          <a:ext cx="0" cy="0"/>
+          <a:chOff x="0" y="0"/>
+          <a:chExt cx="0" cy="0"/>
+        </a:xfrm>
+      </p:grpSpPr>
+      <p:sp>
+        <p:nvSpPr>
+          <p:cNvPr id="2" name="Text 0"/>
+          <p:cNvSpPr/>
+          <p:nvPr/>
+        </p:nvSpPr>
+        <p:spPr>
+          <a:xfrm>
+            <a:off x="457200" y="713232"/>
+            <a:ext cx="11368735" cy="274320"/>
+          </a:xfrm>
+          <a:prstGeom prst="rect">
+            <a:avLst/>
+          </a:prstGeom>
+          <a:noFill/>
+          <a:ln/>
+        </p:spPr>
+        <p:txBody>
+          <a:bodyPr wrap="square" lIns="0" tIns="0" rIns="0" bIns="0" rtlCol="0" anchor="ctr"/>
+          <a:lstStyle/>
+          <a:p>
+            <a:pPr algn="r" indent="0" marL="0">
+              <a:buNone/>
+            </a:pPr>
+            <a:r>
+              <a:rPr lang="en-US" sz="1400" b="1" dirty="0">
+                <a:solidFill>
+                  <a:srgbClr val="1C3F6E"/>
+                </a:solidFill>
+                <a:latin typeface="Calibri" pitchFamily="34" charset="0"/>
+                <a:ea typeface="Calibri" pitchFamily="34" charset="-122"/>
+                <a:cs typeface="Calibri" pitchFamily="34" charset="-120"/>
+              </a:rPr>
+              <a:t>HOMEWORK</a:t>
+            </a:r>
+            <a:endParaRPr lang="en-US" sz="1400" dirty="0"/>
+          </a:p>
+        </p:txBody>
+      </p:sp>
+      <p:pic>
+        <p:nvPicPr>
+          <p:cNvPr id="3" name="Image 0" descr="/home/claude/f4/img/minesec_sheet.png">    </p:cNvPr>
+          <p:cNvPicPr>
+            <a:picLocks noChangeAspect="1"/>
+          </p:cNvPicPr>
+          <p:nvPr/>
+        </p:nvPicPr>
+        <p:blipFill>
+          <a:blip r:embed="rId1"/>
+          <a:stretch>
+            <a:fillRect/>
+          </a:stretch>
+        </p:blipFill>
+        <p:spPr>
+          <a:xfrm>
+            <a:off x="0" y="658368"/>
+            <a:ext cx="5120640" cy="5833872"/>
+          </a:xfrm>
+          <a:prstGeom prst="rect">
+            <a:avLst/>
+          </a:prstGeom>
+        </p:spPr>
+      </p:pic>
+      <p:sp>
+        <p:nvSpPr>
+          <p:cNvPr id="4" name="Text 1"/>
+          <p:cNvSpPr/>
+          <p:nvPr/>
+        </p:nvSpPr>
+        <p:spPr>
+          <a:xfrm>
+            <a:off x="5349240" y="1005840"/>
+            <a:ext cx="6522415" cy="731520"/>
+          </a:xfrm>
+          <a:prstGeom prst="rect">
+            <a:avLst/>
+          </a:prstGeom>
+          <a:noFill/>
+          <a:ln/>
+        </p:spPr>
+        <p:txBody>
+          <a:bodyPr wrap="square" lIns="0" tIns="0" rIns="0" bIns="0" rtlCol="0" anchor="ctr">
+            <a:normAutofit/>
+          </a:bodyPr>
+          <a:lstStyle/>
+          <a:p>
+            <a:pPr algn="ctr" indent="0" marL="0">
+              <a:buNone/>
+            </a:pPr>
+            <a:r>
+              <a:rPr lang="en-US" sz="3600" b="1" dirty="0">
+                <a:solidFill>
+                  <a:srgbClr val="990011"/>
+                </a:solidFill>
+                <a:latin typeface="Times New Roman" pitchFamily="34" charset="0"/>
+                <a:ea typeface="Times New Roman" pitchFamily="34" charset="-122"/>
+                <a:cs typeface="Times New Roman" pitchFamily="34" charset="-120"/>
+              </a:rPr>
+              <a:t>Homework</a:t>
+            </a:r>
+            <a:endParaRPr lang="en-US" sz="3600" dirty="0"/>
+          </a:p>
+        </p:txBody>
+      </p:sp>
+      <p:sp>
+        <p:nvSpPr>
+          <p:cNvPr id="5" name="Text 2"/>
+          <p:cNvSpPr/>
+          <p:nvPr/>
+        </p:nvSpPr>
+        <p:spPr>
+          <a:xfrm>
+            <a:off x="5349240" y="1783080"/>
+            <a:ext cx="6522415" cy="4663440"/>
+          </a:xfrm>
+          <a:prstGeom prst="rect">
+            <a:avLst/>
+          </a:prstGeom>
+          <a:noFill/>
+          <a:ln/>
+        </p:spPr>
+        <p:txBody>
+          <a:bodyPr wrap="square" lIns="0" tIns="0" rIns="0" bIns="0" rtlCol="0" anchor="t"/>
+          <a:lstStyle/>
+          <a:p>
+            <a:pPr algn="l" indent="0" marL="0">
+              <a:spcAft>
+                <a:spcPts val="800"/>
+              </a:spcAft>
+              <a:buNone/>
+            </a:pPr>
+            <a:r>
+              <a:rPr lang="en-US" sz="4000" dirty="0">
+                <a:solidFill>
+                  <a:srgbClr val="111111"/>
+                </a:solidFill>
+                <a:latin typeface="Times New Roman" pitchFamily="34" charset="0"/>
+                <a:ea typeface="Times New Roman" pitchFamily="34" charset="-122"/>
+                <a:cs typeface="Times New Roman" pitchFamily="34" charset="-120"/>
+              </a:rPr>
+              <a:t>List five jobs done by people in your family or neighbourhood (for example farmer, trader, teacher, mechanic, tailor).</a:t>
+            </a:r>
+            <a:endParaRPr lang="en-US" sz="4000" dirty="0"/>
+          </a:p>
+        </p:txBody>
+      </p:sp>
+      <p:sp>
+        <p:nvSpPr>
+          <p:cNvPr id="25" name="Slide Number Placeholder 0"/>
+          <p:cNvSpPr>
+            <a:spLocks noGrp="1"/>
+          </p:cNvSpPr>
+          <p:nvPr>
+            <p:ph type="sldNum" sz="quarter" idx="4294967295"/>
+          </p:nvPr>
+        </p:nvSpPr>
+        <p:spPr>
+          <a:xfrm>
+            <a:off x="27432" y="91440"/>
+            <a:ext cx="585216" cy="475488"/>
+          </a:xfrm>
+          <a:prstGeom prst="rect">
+            <a:avLst/>
+          </a:prstGeom>
+          <a:extLst>
+            <a:ext uri="{C572A759-6A51-4108-AA02-DFA0A04FC94B}">
+              <ma14:wrappingTextBoxFlag xmlns:ma14="http://schemas.microsoft.com/office/mac/drawingml/2011/main" val="0"/>
+            </a:ext>
+          </a:extLst>
+        </p:spPr>
+        <p:txBody>
+          <a:bodyPr/>
+          <a:lstStyle>
+            <a:lvl1pPr>
+              <a:defRPr sz="2000">
+                <a:solidFill>
+                  <a:srgbClr val="FFFFFF"/>
+                </a:solidFill>
+                <a:latin typeface="Calibri"/>
+                <a:ea typeface="Calibri"/>
+                <a:cs typeface="Calibri"/>
+              </a:defRPr>
+            </a:lvl1pPr>
+          </a:lstStyle>
+          <a:p>
+            <a:pPr algn="ctr"/>
+            <a:fld id="{F7021451-1387-4CA6-816F-3879F97B5CBC}" type="slidenum">
+              <a:rPr b="1" lang="en-US"/>
+              <a:t>48</a:t>
+            </a:fld>
+            <a:endParaRPr lang="en-US"/>
+          </a:p>
+        </p:txBody>
+      </p:sp>
+    </p:spTree>
+  </p:cSld>
+  <p:clrMapOvr>
+    <a:masterClrMapping/>
+  </p:clrMapOvr>
+</p:sld>
+</file>
+
+<file path=ppt/slides/slide49.xml><?xml version="1.0" encoding="utf-8"?>
+<p:sld xmlns:a="http://schemas.openxmlformats.org/drawingml/2006/main" xmlns:r="http://schemas.openxmlformats.org/officeDocument/2006/relationships" xmlns:p="http://schemas.openxmlformats.org/presentationml/2006/main">
+  <p:cSld name="Slide 49">
+    <p:spTree>
+      <p:nvGrpSpPr>
+        <p:cNvPr id="1" name=""/>
+        <p:cNvGrpSpPr/>
+        <p:nvPr/>
+      </p:nvGrpSpPr>
+      <p:grpSpPr>
+        <a:xfrm>
+          <a:off x="0" y="0"/>
+          <a:ext cx="0" cy="0"/>
+          <a:chOff x="0" y="0"/>
+          <a:chExt cx="0" cy="0"/>
+        </a:xfrm>
+      </p:grpSpPr>
+      <p:sp>
+        <p:nvSpPr>
+          <p:cNvPr id="2" name="Text 0"/>
+          <p:cNvSpPr/>
+          <p:nvPr/>
+        </p:nvSpPr>
+        <p:spPr>
+          <a:xfrm>
+            <a:off x="457200" y="713232"/>
+            <a:ext cx="11368735" cy="274320"/>
+          </a:xfrm>
+          <a:prstGeom prst="rect">
+            <a:avLst/>
+          </a:prstGeom>
+          <a:noFill/>
+          <a:ln/>
+        </p:spPr>
+        <p:txBody>
+          <a:bodyPr wrap="square" lIns="0" tIns="0" rIns="0" bIns="0" rtlCol="0" anchor="ctr"/>
+          <a:lstStyle/>
+          <a:p>
+            <a:pPr algn="r" indent="0" marL="0">
+              <a:buNone/>
+            </a:pPr>
+            <a:r>
+              <a:rPr lang="en-US" sz="1400" b="1" dirty="0">
+                <a:solidFill>
+                  <a:srgbClr val="1C3F6E"/>
+                </a:solidFill>
+                <a:latin typeface="Calibri" pitchFamily="34" charset="0"/>
+                <a:ea typeface="Calibri" pitchFamily="34" charset="-122"/>
+                <a:cs typeface="Calibri" pitchFamily="34" charset="-120"/>
+              </a:rPr>
+              <a:t>NEXT LESSON</a:t>
+            </a:r>
+            <a:endParaRPr lang="en-US" sz="1400" dirty="0"/>
+          </a:p>
+        </p:txBody>
+      </p:sp>
+      <p:pic>
+        <p:nvPicPr>
+          <p:cNvPr id="3" name="Image 0" descr="/home/claude/f4/img/minesec_sheet.png">    </p:cNvPr>
+          <p:cNvPicPr>
+            <a:picLocks noChangeAspect="1"/>
+          </p:cNvPicPr>
+          <p:nvPr/>
+        </p:nvPicPr>
+        <p:blipFill>
+          <a:blip r:embed="rId1"/>
+          <a:stretch>
+            <a:fillRect/>
+          </a:stretch>
+        </p:blipFill>
+        <p:spPr>
+          <a:xfrm>
+            <a:off x="0" y="658368"/>
+            <a:ext cx="5120640" cy="5833872"/>
+          </a:xfrm>
+          <a:prstGeom prst="rect">
+            <a:avLst/>
+          </a:prstGeom>
+        </p:spPr>
+      </p:pic>
+      <p:sp>
+        <p:nvSpPr>
+          <p:cNvPr id="4" name="Text 1"/>
+          <p:cNvSpPr/>
+          <p:nvPr/>
+        </p:nvSpPr>
+        <p:spPr>
+          <a:xfrm>
+            <a:off x="5349240" y="1005840"/>
+            <a:ext cx="6522415" cy="731520"/>
+          </a:xfrm>
+          <a:prstGeom prst="rect">
+            <a:avLst/>
+          </a:prstGeom>
+          <a:noFill/>
+          <a:ln/>
+        </p:spPr>
+        <p:txBody>
+          <a:bodyPr wrap="square" lIns="0" tIns="0" rIns="0" bIns="0" rtlCol="0" anchor="ctr">
+            <a:normAutofit/>
+          </a:bodyPr>
+          <a:lstStyle/>
+          <a:p>
+            <a:pPr algn="ctr" indent="0" marL="0">
+              <a:buNone/>
+            </a:pPr>
+            <a:r>
+              <a:rPr lang="en-US" sz="3600" b="1" dirty="0">
+                <a:solidFill>
+                  <a:srgbClr val="990011"/>
+                </a:solidFill>
+                <a:latin typeface="Times New Roman" pitchFamily="34" charset="0"/>
+                <a:ea typeface="Times New Roman" pitchFamily="34" charset="-122"/>
+                <a:cs typeface="Times New Roman" pitchFamily="34" charset="-120"/>
+              </a:rPr>
+              <a:t>Next Lesson</a:t>
+            </a:r>
+            <a:endParaRPr lang="en-US" sz="3600" dirty="0"/>
+          </a:p>
+        </p:txBody>
+      </p:sp>
+      <p:sp>
+        <p:nvSpPr>
+          <p:cNvPr id="5" name="Text 2"/>
+          <p:cNvSpPr/>
+          <p:nvPr/>
+        </p:nvSpPr>
+        <p:spPr>
+          <a:xfrm>
+            <a:off x="5349240" y="1783080"/>
+            <a:ext cx="6522415" cy="4663440"/>
+          </a:xfrm>
+          <a:prstGeom prst="rect">
+            <a:avLst/>
+          </a:prstGeom>
+          <a:noFill/>
+          <a:ln/>
+        </p:spPr>
+        <p:txBody>
+          <a:bodyPr wrap="square" lIns="0" tIns="0" rIns="0" bIns="0" rtlCol="0" anchor="ctr"/>
+          <a:lstStyle/>
+          <a:p>
+            <a:pPr algn="ctr" indent="0" marL="0">
+              <a:spcAft>
+                <a:spcPts val="800"/>
+              </a:spcAft>
+              <a:buNone/>
+            </a:pPr>
+            <a:r>
+              <a:rPr lang="en-US" sz="4000" b="1" dirty="0">
+                <a:solidFill>
+                  <a:srgbClr val="111111"/>
+                </a:solidFill>
+                <a:latin typeface="Times New Roman" pitchFamily="34" charset="0"/>
+                <a:ea typeface="Times New Roman" pitchFamily="34" charset="-122"/>
+                <a:cs typeface="Times New Roman" pitchFamily="34" charset="-120"/>
+              </a:rPr>
+              <a:t>Our next lesson will be on:</a:t>
+            </a:r>
+            <a:endParaRPr lang="en-US" sz="4000" dirty="0"/>
+          </a:p>
+          <a:p>
+            <a:pPr algn="ctr" indent="0" marL="0">
+              <a:spcAft>
+                <a:spcPts val="800"/>
+              </a:spcAft>
+              <a:buNone/>
+            </a:pPr>
+            <a:r>
+              <a:rPr lang="en-US" sz="4000" b="1" dirty="0">
+                <a:solidFill>
+                  <a:srgbClr val="990011"/>
+                </a:solidFill>
+                <a:latin typeface="Times New Roman" pitchFamily="34" charset="0"/>
+                <a:ea typeface="Times New Roman" pitchFamily="34" charset="-122"/>
+                <a:cs typeface="Times New Roman" pitchFamily="34" charset="-120"/>
+              </a:rPr>
+              <a:t>Lesson 5 (Part 1): The Sectors of the Economy: Introduction, Definitions and Key Concepts</a:t>
+            </a:r>
+            <a:endParaRPr lang="en-US" sz="4000" dirty="0"/>
+          </a:p>
+        </p:txBody>
+      </p:sp>
+      <p:sp>
+        <p:nvSpPr>
+          <p:cNvPr id="25" name="Slide Number Placeholder 0"/>
+          <p:cNvSpPr>
+            <a:spLocks noGrp="1"/>
+          </p:cNvSpPr>
+          <p:nvPr>
+            <p:ph type="sldNum" sz="quarter" idx="4294967295"/>
+          </p:nvPr>
+        </p:nvSpPr>
+        <p:spPr>
+          <a:xfrm>
+            <a:off x="27432" y="91440"/>
+            <a:ext cx="585216" cy="475488"/>
+          </a:xfrm>
+          <a:prstGeom prst="rect">
+            <a:avLst/>
+          </a:prstGeom>
+          <a:extLst>
+            <a:ext uri="{C572A759-6A51-4108-AA02-DFA0A04FC94B}">
+              <ma14:wrappingTextBoxFlag xmlns:ma14="http://schemas.microsoft.com/office/mac/drawingml/2011/main" val="0"/>
+            </a:ext>
+          </a:extLst>
+        </p:spPr>
+        <p:txBody>
+          <a:bodyPr/>
+          <a:lstStyle>
+            <a:lvl1pPr>
+              <a:defRPr sz="2000">
+                <a:solidFill>
+                  <a:srgbClr val="FFFFFF"/>
+                </a:solidFill>
+                <a:latin typeface="Calibri"/>
+                <a:ea typeface="Calibri"/>
+                <a:cs typeface="Calibri"/>
+              </a:defRPr>
+            </a:lvl1pPr>
+          </a:lstStyle>
+          <a:p>
+            <a:pPr algn="ctr"/>
+            <a:fld id="{F7021451-1387-4CA6-816F-3879F97B5CBC}" type="slidenum">
+              <a:rPr b="1" lang="en-US"/>
+              <a:t>49</a:t>
+            </a:fld>
+            <a:endParaRPr lang="en-US"/>
+          </a:p>
+        </p:txBody>
+      </p:sp>
+    </p:spTree>
+  </p:cSld>
+  <p:clrMapOvr>
+    <a:masterClrMapping/>
+  </p:clrMapOvr>
+</p:sld>
+</file>
+
+<file path=ppt/slides/slide5.xml><?xml version="1.0" encoding="utf-8"?>
+<p:sld xmlns:a="http://schemas.openxmlformats.org/drawingml/2006/main" xmlns:r="http://schemas.openxmlformats.org/officeDocument/2006/relationships" xmlns:p="http://schemas.openxmlformats.org/presentationml/2006/main">
+  <p:cSld name="Slide 5">
+    <p:spTree>
+      <p:nvGrpSpPr>
+        <p:cNvPr id="1" name=""/>
+        <p:cNvGrpSpPr/>
+        <p:nvPr/>
+      </p:nvGrpSpPr>
+      <p:grpSpPr>
+        <a:xfrm>
+          <a:off x="0" y="0"/>
+          <a:ext cx="0" cy="0"/>
+          <a:chOff x="0" y="0"/>
+          <a:chExt cx="0" cy="0"/>
+        </a:xfrm>
+      </p:grpSpPr>
+      <p:sp>
+        <p:nvSpPr>
+          <p:cNvPr id="2" name="Text 0"/>
+          <p:cNvSpPr/>
+          <p:nvPr/>
+        </p:nvSpPr>
+        <p:spPr>
+          <a:xfrm>
+            <a:off x="457200" y="713232"/>
+            <a:ext cx="11368735" cy="274320"/>
+          </a:xfrm>
+          <a:prstGeom prst="rect">
+            <a:avLst/>
+          </a:prstGeom>
+          <a:noFill/>
+          <a:ln/>
+        </p:spPr>
+        <p:txBody>
+          <a:bodyPr wrap="square" lIns="0" tIns="0" rIns="0" bIns="0" rtlCol="0" anchor="ctr"/>
+          <a:lstStyle/>
+          <a:p>
+            <a:pPr algn="r" indent="0" marL="0">
+              <a:buNone/>
+            </a:pPr>
+            <a:r>
+              <a:rPr lang="en-US" sz="1400" b="1" dirty="0">
+                <a:solidFill>
+                  <a:srgbClr val="1C3F6E"/>
+                </a:solidFill>
+                <a:latin typeface="Calibri" pitchFamily="34" charset="0"/>
+                <a:ea typeface="Calibri" pitchFamily="34" charset="-122"/>
+                <a:cs typeface="Calibri" pitchFamily="34" charset="-120"/>
+              </a:rPr>
+              <a:t>HOMEWORK CORRECTION</a:t>
+            </a:r>
+            <a:endParaRPr lang="en-US" sz="1400" dirty="0"/>
+          </a:p>
+        </p:txBody>
+      </p:sp>
+      <p:pic>
+        <p:nvPicPr>
+          <p:cNvPr id="3" name="Image 0" descr="/home/claude/f4/img/minesec_sheet.png">    </p:cNvPr>
+          <p:cNvPicPr>
+            <a:picLocks noChangeAspect="1"/>
+          </p:cNvPicPr>
+          <p:nvPr/>
+        </p:nvPicPr>
+        <p:blipFill>
+          <a:blip r:embed="rId1"/>
+          <a:stretch>
+            <a:fillRect/>
+          </a:stretch>
+        </p:blipFill>
+        <p:spPr>
+          <a:xfrm>
+            <a:off x="0" y="658368"/>
+            <a:ext cx="5120640" cy="5833872"/>
+          </a:xfrm>
+          <a:prstGeom prst="rect">
+            <a:avLst/>
+          </a:prstGeom>
+        </p:spPr>
+      </p:pic>
+      <p:sp>
+        <p:nvSpPr>
+          <p:cNvPr id="4" name="Text 1"/>
+          <p:cNvSpPr/>
+          <p:nvPr/>
+        </p:nvSpPr>
+        <p:spPr>
+          <a:xfrm>
+            <a:off x="5349240" y="1005840"/>
+            <a:ext cx="6522415" cy="731520"/>
+          </a:xfrm>
+          <a:prstGeom prst="rect">
+            <a:avLst/>
+          </a:prstGeom>
+          <a:noFill/>
+          <a:ln/>
+        </p:spPr>
+        <p:txBody>
+          <a:bodyPr wrap="square" lIns="0" tIns="0" rIns="0" bIns="0" rtlCol="0" anchor="ctr">
+            <a:normAutofit/>
+          </a:bodyPr>
+          <a:lstStyle/>
+          <a:p>
+            <a:pPr algn="ctr" indent="0" marL="0">
+              <a:buNone/>
+            </a:pPr>
+            <a:r>
+              <a:rPr lang="en-US" sz="3600" b="1" dirty="0">
+                <a:solidFill>
+                  <a:srgbClr val="990011"/>
+                </a:solidFill>
+                <a:latin typeface="Times New Roman" pitchFamily="34" charset="0"/>
+                <a:ea typeface="Times New Roman" pitchFamily="34" charset="-122"/>
+                <a:cs typeface="Times New Roman" pitchFamily="34" charset="-120"/>
+              </a:rPr>
+              <a:t>Correction: Possible Answer</a:t>
+            </a:r>
+            <a:endParaRPr lang="en-US" sz="3600" dirty="0"/>
+          </a:p>
+        </p:txBody>
+      </p:sp>
+      <p:sp>
+        <p:nvSpPr>
+          <p:cNvPr id="5" name="Text 2"/>
+          <p:cNvSpPr/>
+          <p:nvPr/>
+        </p:nvSpPr>
+        <p:spPr>
+          <a:xfrm>
+            <a:off x="5349240" y="1783080"/>
+            <a:ext cx="6522415" cy="4663440"/>
+          </a:xfrm>
+          <a:prstGeom prst="rect">
+            <a:avLst/>
+          </a:prstGeom>
+          <a:noFill/>
+          <a:ln/>
+        </p:spPr>
+        <p:txBody>
+          <a:bodyPr wrap="square" lIns="0" tIns="0" rIns="0" bIns="0" rtlCol="0" anchor="t"/>
+          <a:lstStyle/>
+          <a:p>
+            <a:pPr algn="l" indent="0" marL="0">
+              <a:spcAft>
+                <a:spcPts val="800"/>
+              </a:spcAft>
+              <a:buNone/>
+            </a:pPr>
+            <a:r>
+              <a:rPr lang="en-US" sz="4000" dirty="0">
+                <a:solidFill>
+                  <a:srgbClr val="111111"/>
+                </a:solidFill>
+                <a:latin typeface="Times New Roman" pitchFamily="34" charset="0"/>
+                <a:ea typeface="Times New Roman" pitchFamily="34" charset="-122"/>
+                <a:cs typeface="Times New Roman" pitchFamily="34" charset="-120"/>
+              </a:rPr>
+              <a:t>Examples: snow and ice block roads and cause accidents; it is very cold, so people must pay for heating; days are short and dark; water pipes can freeze.</a:t>
+            </a:r>
+            <a:endParaRPr lang="en-US" sz="4000" dirty="0"/>
+          </a:p>
+        </p:txBody>
+      </p:sp>
+      <p:sp>
+        <p:nvSpPr>
+          <p:cNvPr id="25" name="Slide Number Placeholder 0"/>
+          <p:cNvSpPr>
+            <a:spLocks noGrp="1"/>
+          </p:cNvSpPr>
+          <p:nvPr>
+            <p:ph type="sldNum" sz="quarter" idx="4294967295"/>
+          </p:nvPr>
+        </p:nvSpPr>
+        <p:spPr>
+          <a:xfrm>
+            <a:off x="27432" y="91440"/>
+            <a:ext cx="585216" cy="475488"/>
+          </a:xfrm>
+          <a:prstGeom prst="rect">
+            <a:avLst/>
+          </a:prstGeom>
+          <a:extLst>
+            <a:ext uri="{C572A759-6A51-4108-AA02-DFA0A04FC94B}">
+              <ma14:wrappingTextBoxFlag xmlns:ma14="http://schemas.microsoft.com/office/mac/drawingml/2011/main" val="0"/>
+            </a:ext>
+          </a:extLst>
+        </p:spPr>
+        <p:txBody>
+          <a:bodyPr/>
+          <a:lstStyle>
+            <a:lvl1pPr>
+              <a:defRPr sz="2000">
+                <a:solidFill>
+                  <a:srgbClr val="FFFFFF"/>
+                </a:solidFill>
+                <a:latin typeface="Calibri"/>
+                <a:ea typeface="Calibri"/>
+                <a:cs typeface="Calibri"/>
+              </a:defRPr>
+            </a:lvl1pPr>
+          </a:lstStyle>
+          <a:p>
+            <a:pPr algn="ctr"/>
+            <a:fld id="{F7021451-1387-4CA6-816F-3879F97B5CBC}" type="slidenum">
+              <a:rPr b="1" lang="en-US"/>
+              <a:t>5</a:t>
+            </a:fld>
+            <a:endParaRPr lang="en-US"/>
+          </a:p>
+        </p:txBody>
+      </p:sp>
+    </p:spTree>
+  </p:cSld>
+  <p:clrMapOvr>
+    <a:masterClrMapping/>
+  </p:clrMapOvr>
+</p:sld>
+</file>
+
+<file path=ppt/slides/slide50.xml><?xml version="1.0" encoding="utf-8"?>
+<p:sld xmlns:a="http://schemas.openxmlformats.org/drawingml/2006/main" xmlns:r="http://schemas.openxmlformats.org/officeDocument/2006/relationships" xmlns:p="http://schemas.openxmlformats.org/presentationml/2006/main">
+  <p:cSld name="Slide 50">
+    <p:spTree>
+      <p:nvGrpSpPr>
+        <p:cNvPr id="1" name=""/>
+        <p:cNvGrpSpPr/>
+        <p:nvPr/>
+      </p:nvGrpSpPr>
+      <p:grpSpPr>
+        <a:xfrm>
+          <a:off x="0" y="0"/>
+          <a:ext cx="0" cy="0"/>
+          <a:chOff x="0" y="0"/>
+          <a:chExt cx="0" cy="0"/>
+        </a:xfrm>
+      </p:grpSpPr>
+      <p:sp>
+        <p:nvSpPr>
+          <p:cNvPr id="2" name="Text 0"/>
+          <p:cNvSpPr/>
+          <p:nvPr/>
+        </p:nvSpPr>
+        <p:spPr>
+          <a:xfrm>
+            <a:off x="457200" y="713232"/>
+            <a:ext cx="11368735" cy="274320"/>
+          </a:xfrm>
+          <a:prstGeom prst="rect">
+            <a:avLst/>
+          </a:prstGeom>
+          <a:noFill/>
+          <a:ln/>
+        </p:spPr>
+        <p:txBody>
+          <a:bodyPr wrap="square" lIns="0" tIns="0" rIns="0" bIns="0" rtlCol="0" anchor="ctr"/>
+          <a:lstStyle/>
+          <a:p>
+            <a:pPr algn="r" indent="0" marL="0">
+              <a:buNone/>
+            </a:pPr>
+            <a:r>
+              <a:rPr lang="en-US" sz="1400" b="1" dirty="0">
+                <a:solidFill>
+                  <a:srgbClr val="1C3F6E"/>
+                </a:solidFill>
+                <a:latin typeface="Calibri" pitchFamily="34" charset="0"/>
+                <a:ea typeface="Calibri" pitchFamily="34" charset="-122"/>
+                <a:cs typeface="Calibri" pitchFamily="34" charset="-120"/>
+              </a:rPr>
               <a:t>BILINGUAL GAME</a:t>
             </a:r>
             <a:endParaRPr lang="en-US" sz="1400" dirty="0"/>
@@ -16770,7 +18031,7 @@
       </p:sp>
       <p:graphicFrame>
         <p:nvGraphicFramePr>
-          <p:cNvPr id="48" name="Table 0"/>
+          <p:cNvPr id="51" name="Table 0"/>
           <p:cNvGraphicFramePr>
             <a:graphicFrameLocks noGrp="1"/>
           </p:cNvGraphicFramePr>
@@ -18082,7 +19343,7 @@
             <a:pPr algn="ctr"/>
             <a:fld id="{F7021451-1387-4CA6-816F-3879F97B5CBC}" type="slidenum">
               <a:rPr b="1" lang="en-US"/>
-              <a:t>47</a:t>
+              <a:t>50</a:t>
             </a:fld>
             <a:endParaRPr lang="en-US"/>
           </a:p>
@@ -18096,9 +19357,9 @@
 </p:sld>
 </file>
 
-<file path=ppt/slides/slide48.xml><?xml version="1.0" encoding="utf-8"?>
+<file path=ppt/slides/slide51.xml><?xml version="1.0" encoding="utf-8"?>
 <p:sld xmlns:a="http://schemas.openxmlformats.org/drawingml/2006/main" xmlns:r="http://schemas.openxmlformats.org/officeDocument/2006/relationships" xmlns:p="http://schemas.openxmlformats.org/presentationml/2006/main">
-  <p:cSld name="Slide 48">
+  <p:cSld name="Slide 51">
     <p:spTree>
       <p:nvGrpSpPr>
         <p:cNvPr id="1" name=""/>
@@ -18193,7 +19454,7 @@
       </p:sp>
       <p:graphicFrame>
         <p:nvGraphicFramePr>
-          <p:cNvPr id="49" name="Table 0"/>
+          <p:cNvPr id="52" name="Table 0"/>
           <p:cNvGraphicFramePr>
             <a:graphicFrameLocks noGrp="1"/>
           </p:cNvGraphicFramePr>
@@ -18815,7 +20076,7 @@
             <a:pPr algn="ctr"/>
             <a:fld id="{F7021451-1387-4CA6-816F-3879F97B5CBC}" type="slidenum">
               <a:rPr b="1" lang="en-US"/>
-              <a:t>48</a:t>
+              <a:t>51</a:t>
             </a:fld>
             <a:endParaRPr lang="en-US"/>
           </a:p>
@@ -18829,9 +20090,9 @@
 </p:sld>
 </file>
 
-<file path=ppt/slides/slide49.xml><?xml version="1.0" encoding="utf-8"?>
+<file path=ppt/slides/slide52.xml><?xml version="1.0" encoding="utf-8"?>
 <p:sld xmlns:a="http://schemas.openxmlformats.org/drawingml/2006/main" xmlns:r="http://schemas.openxmlformats.org/officeDocument/2006/relationships" xmlns:p="http://schemas.openxmlformats.org/presentationml/2006/main">
-  <p:cSld name="Slide 49">
+  <p:cSld name="Slide 52">
     <p:spTree>
       <p:nvGrpSpPr>
         <p:cNvPr id="1" name=""/>
@@ -18926,7 +20187,7 @@
       </p:sp>
       <p:graphicFrame>
         <p:nvGraphicFramePr>
-          <p:cNvPr id="50" name="Table 0"/>
+          <p:cNvPr id="53" name="Table 0"/>
           <p:cNvGraphicFramePr>
             <a:graphicFrameLocks noGrp="1"/>
           </p:cNvGraphicFramePr>
@@ -19686,7 +20947,7 @@
             <a:pPr algn="ctr"/>
             <a:fld id="{F7021451-1387-4CA6-816F-3879F97B5CBC}" type="slidenum">
               <a:rPr b="1" lang="en-US"/>
-              <a:t>49</a:t>
+              <a:t>52</a:t>
             </a:fld>
             <a:endParaRPr lang="en-US"/>
           </a:p>
@@ -19700,9 +20961,9 @@
 </p:sld>
 </file>
 
-<file path=ppt/slides/slide5.xml><?xml version="1.0" encoding="utf-8"?>
+<file path=ppt/slides/slide53.xml><?xml version="1.0" encoding="utf-8"?>
 <p:sld xmlns:a="http://schemas.openxmlformats.org/drawingml/2006/main" xmlns:r="http://schemas.openxmlformats.org/officeDocument/2006/relationships" xmlns:p="http://schemas.openxmlformats.org/presentationml/2006/main">
-  <p:cSld name="Slide 5">
+  <p:cSld name="Slide 53">
     <p:spTree>
       <p:nvGrpSpPr>
         <p:cNvPr id="1" name=""/>
@@ -19750,7 +21011,7 @@
                 <a:ea typeface="Calibri" pitchFamily="34" charset="-122"/>
                 <a:cs typeface="Calibri" pitchFamily="34" charset="-120"/>
               </a:rPr>
-              <a:t>HOMEWORK CORRECTION</a:t>
+              <a:t>TEACHER'S NOTE</a:t>
             </a:r>
             <a:endParaRPr lang="en-US" sz="1400" dirty="0"/>
           </a:p>
@@ -19773,7 +21034,7 @@
         <p:spPr>
           <a:xfrm>
             <a:off x="0" y="658368"/>
-            <a:ext cx="5120640" cy="5833872"/>
+            <a:ext cx="3840480" cy="5833872"/>
           </a:xfrm>
           <a:prstGeom prst="rect">
             <a:avLst/>
@@ -19788,8 +21049,8 @@
         </p:nvSpPr>
         <p:spPr>
           <a:xfrm>
-            <a:off x="5349240" y="1005840"/>
-            <a:ext cx="6522415" cy="731520"/>
+            <a:off x="4069080" y="1005840"/>
+            <a:ext cx="7802575" cy="731520"/>
           </a:xfrm>
           <a:prstGeom prst="rect">
             <a:avLst/>
@@ -19815,7 +21076,7 @@
                 <a:ea typeface="Times New Roman" pitchFamily="34" charset="-122"/>
                 <a:cs typeface="Times New Roman" pitchFamily="34" charset="-120"/>
               </a:rPr>
-              <a:t>Correction: Possible Answer</a:t>
+              <a:t>Teacher's Note</a:t>
             </a:r>
             <a:endParaRPr lang="en-US" sz="3600" dirty="0"/>
           </a:p>
@@ -19829,8 +21090,8 @@
         </p:nvSpPr>
         <p:spPr>
           <a:xfrm>
-            <a:off x="5349240" y="1783080"/>
-            <a:ext cx="6522415" cy="4663440"/>
+            <a:off x="4069080" y="1783080"/>
+            <a:ext cx="7802575" cy="4663440"/>
           </a:xfrm>
           <a:prstGeom prst="rect">
             <a:avLst/>
@@ -19842,24 +21103,130 @@
           <a:bodyPr wrap="square" lIns="0" tIns="0" rIns="0" bIns="0" rtlCol="0" anchor="t"/>
           <a:lstStyle/>
           <a:p>
-            <a:pPr algn="l" indent="0" marL="0">
+            <a:pPr algn="l" marL="342900" indent="-342900">
               <a:spcAft>
                 <a:spcPts val="800"/>
               </a:spcAft>
-              <a:buNone/>
+              <a:buSzPct val="100000"/>
+              <a:buChar char="•"/>
             </a:pPr>
             <a:r>
-              <a:rPr lang="en-US" sz="4000" dirty="0">
+              <a:rPr lang="en-US" sz="2000" dirty="0">
                 <a:solidFill>
                   <a:srgbClr val="111111"/>
                 </a:solidFill>
-                <a:latin typeface="Times New Roman" pitchFamily="34" charset="0"/>
-                <a:ea typeface="Times New Roman" pitchFamily="34" charset="-122"/>
-                <a:cs typeface="Times New Roman" pitchFamily="34" charset="-120"/>
+                <a:latin typeface="Calibri" pitchFamily="34" charset="0"/>
+                <a:ea typeface="Calibri" pitchFamily="34" charset="-122"/>
+                <a:cs typeface="Calibri" pitchFamily="34" charset="-120"/>
               </a:rPr>
-              <a:t>Examples: snow and ice block roads and cause accidents; it is very cold, so people must pay for heating; days are short and dark; water pipes can freeze.</a:t>
-            </a:r>
-            <a:endParaRPr lang="en-US" sz="4000" dirty="0"/>
+              <a:t>Timing: Homework correction, plan, objectives 8 min | Recall, situation, action 10 min | 5 activities 30 min | Board summary (copying) 30 min | Evaluation, remediation 10 min | Homework, next lesson 5 min | Logbook 7 min</a:t>
+            </a:r>
+            <a:endParaRPr lang="en-US" sz="2000" dirty="0"/>
+          </a:p>
+          <a:p>
+            <a:pPr algn="l" marL="342900" indent="-342900">
+              <a:spcAft>
+                <a:spcPts val="800"/>
+              </a:spcAft>
+              <a:buSzPct val="100000"/>
+              <a:buChar char="•"/>
+            </a:pPr>
+            <a:r>
+              <a:rPr lang="en-US" sz="2000" dirty="0">
+                <a:solidFill>
+                  <a:srgbClr val="111111"/>
+                </a:solidFill>
+                <a:latin typeface="Calibri" pitchFamily="34" charset="0"/>
+                <a:ea typeface="Calibri" pitchFamily="34" charset="-122"/>
+                <a:cs typeface="Calibri" pitchFamily="34" charset="-120"/>
+              </a:rPr>
+              <a:t>Without the projector (Activity 1): describe a blocked road.</a:t>
+            </a:r>
+            <a:endParaRPr lang="en-US" sz="2000" dirty="0"/>
+          </a:p>
+          <a:p>
+            <a:pPr algn="l" marL="342900" indent="-342900">
+              <a:spcAft>
+                <a:spcPts val="800"/>
+              </a:spcAft>
+              <a:buSzPct val="100000"/>
+              <a:buChar char="•"/>
+            </a:pPr>
+            <a:r>
+              <a:rPr lang="en-US" sz="2000" dirty="0">
+                <a:solidFill>
+                  <a:srgbClr val="111111"/>
+                </a:solidFill>
+                <a:latin typeface="Calibri" pitchFamily="34" charset="0"/>
+                <a:ea typeface="Calibri" pitchFamily="34" charset="-122"/>
+                <a:cs typeface="Calibri" pitchFamily="34" charset="-120"/>
+              </a:rPr>
+              <a:t>Without the projector (Activity 2): describe dust in the Harmattan.</a:t>
+            </a:r>
+            <a:endParaRPr lang="en-US" sz="2000" dirty="0"/>
+          </a:p>
+          <a:p>
+            <a:pPr algn="l" marL="342900" indent="-342900">
+              <a:spcAft>
+                <a:spcPts val="800"/>
+              </a:spcAft>
+              <a:buSzPct val="100000"/>
+              <a:buChar char="•"/>
+            </a:pPr>
+            <a:r>
+              <a:rPr lang="en-US" sz="2000" dirty="0">
+                <a:solidFill>
+                  <a:srgbClr val="111111"/>
+                </a:solidFill>
+                <a:latin typeface="Calibri" pitchFamily="34" charset="0"/>
+                <a:ea typeface="Calibri" pitchFamily="34" charset="-122"/>
+                <a:cs typeface="Calibri" pitchFamily="34" charset="-120"/>
+              </a:rPr>
+              <a:t>Without the projector (Activity 3): compare with bush fires.</a:t>
+            </a:r>
+            <a:endParaRPr lang="en-US" sz="2000" dirty="0"/>
+          </a:p>
+          <a:p>
+            <a:pPr algn="l" marL="342900" indent="-342900">
+              <a:spcAft>
+                <a:spcPts val="800"/>
+              </a:spcAft>
+              <a:buSzPct val="100000"/>
+              <a:buChar char="•"/>
+            </a:pPr>
+            <a:r>
+              <a:rPr lang="en-US" sz="2000" dirty="0">
+                <a:solidFill>
+                  <a:srgbClr val="111111"/>
+                </a:solidFill>
+                <a:latin typeface="Calibri" pitchFamily="34" charset="0"/>
+                <a:ea typeface="Calibri" pitchFamily="34" charset="-122"/>
+                <a:cs typeface="Calibri" pitchFamily="34" charset="-120"/>
+              </a:rPr>
+              <a:t>Without the projector (Activity 4): describe a closed car in the sun.</a:t>
+            </a:r>
+            <a:endParaRPr lang="en-US" sz="2000" dirty="0"/>
+          </a:p>
+          <a:p>
+            <a:pPr algn="l" marL="342900" indent="-342900">
+              <a:spcAft>
+                <a:spcPts val="800"/>
+              </a:spcAft>
+              <a:buSzPct val="100000"/>
+              <a:buChar char="•"/>
+            </a:pPr>
+            <a:r>
+              <a:rPr lang="en-US" sz="2000" dirty="0">
+                <a:solidFill>
+                  <a:srgbClr val="111111"/>
+                </a:solidFill>
+                <a:latin typeface="Calibri" pitchFamily="34" charset="0"/>
+                <a:ea typeface="Calibri" pitchFamily="34" charset="-122"/>
+                <a:cs typeface="Calibri" pitchFamily="34" charset="-120"/>
+              </a:rPr>
+              <a:t>Without the projector (Activity 5): describe a hedge.</a:t>
+            </a:r>
+            <a:endParaRPr lang="en-US" sz="2000" dirty="0"/>
           </a:p>
         </p:txBody>
       </p:sp>
@@ -19905,7 +21272,7 @@
             <a:pPr algn="ctr"/>
             <a:fld id="{F7021451-1387-4CA6-816F-3879F97B5CBC}" type="slidenum">
               <a:rPr b="1" lang="en-US"/>
-              <a:t>5</a:t>
+              <a:t>53</a:t>
             </a:fld>
             <a:endParaRPr lang="en-US"/>
           </a:p>
@@ -19919,9 +21286,9 @@
 </p:sld>
 </file>
 
-<file path=ppt/slides/slide50.xml><?xml version="1.0" encoding="utf-8"?>
+<file path=ppt/slides/slide54.xml><?xml version="1.0" encoding="utf-8"?>
 <p:sld xmlns:a="http://schemas.openxmlformats.org/drawingml/2006/main" xmlns:r="http://schemas.openxmlformats.org/officeDocument/2006/relationships" xmlns:p="http://schemas.openxmlformats.org/presentationml/2006/main">
-  <p:cSld name="Slide 50">
+  <p:cSld name="Slide 54">
     <p:spTree>
       <p:nvGrpSpPr>
         <p:cNvPr id="1" name=""/>
@@ -19969,7 +21336,7 @@
                 <a:ea typeface="Calibri" pitchFamily="34" charset="-122"/>
                 <a:cs typeface="Calibri" pitchFamily="34" charset="-120"/>
               </a:rPr>
-              <a:t>TEACHER'S NOTE</a:t>
+              <a:t>REFERENCES</a:t>
             </a:r>
             <a:endParaRPr lang="en-US" sz="1400" dirty="0"/>
           </a:p>
@@ -20034,7 +21401,7 @@
                 <a:ea typeface="Times New Roman" pitchFamily="34" charset="-122"/>
                 <a:cs typeface="Times New Roman" pitchFamily="34" charset="-120"/>
               </a:rPr>
-              <a:t>Teacher's Note</a:t>
+              <a:t>References</a:t>
             </a:r>
             <a:endParaRPr lang="en-US" sz="3600" dirty="0"/>
           </a:p>
@@ -20069,7 +21436,7 @@
               <a:buChar char="•"/>
             </a:pPr>
             <a:r>
-              <a:rPr lang="en-US" sz="2000" dirty="0">
+              <a:rPr lang="en-US" sz="1800" dirty="0">
                 <a:solidFill>
                   <a:srgbClr val="111111"/>
                 </a:solidFill>
@@ -20077,9 +21444,9 @@
                 <a:ea typeface="Calibri" pitchFamily="34" charset="-122"/>
                 <a:cs typeface="Calibri" pitchFamily="34" charset="-120"/>
               </a:rPr>
-              <a:t>Timing: Homework correction, plan, objectives 8 min | Recall, situation, action 10 min | 5 activities 30 min | Board summary (copying) 30 min | Evaluation, remediation 10 min | Homework, next lesson 5 min | Logbook 7 min</a:t>
-            </a:r>
-            <a:endParaRPr lang="en-US" sz="2000" dirty="0"/>
+              <a:t>Harmonised Progression Sheet, Economic Geography (5051), Form 2.</a:t>
+            </a:r>
+            <a:endParaRPr lang="en-US" sz="1800" dirty="0"/>
           </a:p>
           <a:p>
             <a:pPr algn="l" marL="342900" indent="-342900">
@@ -20090,7 +21457,7 @@
               <a:buChar char="•"/>
             </a:pPr>
             <a:r>
-              <a:rPr lang="en-US" sz="2000" dirty="0">
+              <a:rPr lang="en-US" sz="1800" dirty="0">
                 <a:solidFill>
                   <a:srgbClr val="111111"/>
                 </a:solidFill>
@@ -20098,9 +21465,9 @@
                 <a:ea typeface="Calibri" pitchFamily="34" charset="-122"/>
                 <a:cs typeface="Calibri" pitchFamily="34" charset="-120"/>
               </a:rPr>
-              <a:t>Without the projector (Activity 1): describe a road covered with snow.</a:t>
-            </a:r>
-            <a:endParaRPr lang="en-US" sz="2000" dirty="0"/>
+              <a:t>Class textbook: The major biomes of the world (temperate regions).</a:t>
+            </a:r>
+            <a:endParaRPr lang="en-US" sz="1800" dirty="0"/>
           </a:p>
           <a:p>
             <a:pPr algn="l" marL="342900" indent="-342900">
@@ -20111,7 +21478,7 @@
               <a:buChar char="•"/>
             </a:pPr>
             <a:r>
-              <a:rPr lang="en-US" sz="2000" dirty="0">
+              <a:rPr lang="en-US" sz="1800" dirty="0">
                 <a:solidFill>
                   <a:srgbClr val="111111"/>
                 </a:solidFill>
@@ -20119,9 +21486,9 @@
                 <a:ea typeface="Calibri" pitchFamily="34" charset="-122"/>
                 <a:cs typeface="Calibri" pitchFamily="34" charset="-120"/>
               </a:rPr>
-              <a:t>Without the projector (Activity 2): compare with a very strong Harmattan.</a:t>
-            </a:r>
-            <a:endParaRPr lang="en-US" sz="2000" dirty="0"/>
+              <a:t>Photo, Activity 1: “First Snowplow of the Season” by JLS Photography - Alaska, CC BY-NC-ND 2.0, via Flickr (https://www.flickr.com/photos/50830796@N04/37613240186)</a:t>
+            </a:r>
+            <a:endParaRPr lang="en-US" sz="1800" dirty="0"/>
           </a:p>
           <a:p>
             <a:pPr algn="l" marL="342900" indent="-342900">
@@ -20132,7 +21499,7 @@
               <a:buChar char="•"/>
             </a:pPr>
             <a:r>
-              <a:rPr lang="en-US" sz="2000" dirty="0">
+              <a:rPr lang="en-US" sz="1800" dirty="0">
                 <a:solidFill>
                   <a:srgbClr val="111111"/>
                 </a:solidFill>
@@ -20140,9 +21507,9 @@
                 <a:ea typeface="Calibri" pitchFamily="34" charset="-122"/>
                 <a:cs typeface="Calibri" pitchFamily="34" charset="-120"/>
               </a:rPr>
-              <a:t>Without the projector (Activity 3): compare with bush fires in the savanna.</a:t>
-            </a:r>
-            <a:endParaRPr lang="en-US" sz="2000" dirty="0"/>
+              <a:t>Photo, Activity 2: “Dust Bowl 1935” by MyEyeSees, CC BY-NC-ND 2.0, via Flickr (https://www.flickr.com/photos/57884042@N00/3182214903)</a:t>
+            </a:r>
+            <a:endParaRPr lang="en-US" sz="1800" dirty="0"/>
           </a:p>
           <a:p>
             <a:pPr algn="l" marL="342900" indent="-342900">
@@ -20153,7 +21520,7 @@
               <a:buChar char="•"/>
             </a:pPr>
             <a:r>
-              <a:rPr lang="en-US" sz="2000" dirty="0">
+              <a:rPr lang="en-US" sz="1800" dirty="0">
                 <a:solidFill>
                   <a:srgbClr val="111111"/>
                 </a:solidFill>
@@ -20161,9 +21528,9 @@
                 <a:ea typeface="Calibri" pitchFamily="34" charset="-122"/>
                 <a:cs typeface="Calibri" pitchFamily="34" charset="-120"/>
               </a:rPr>
-              <a:t>Without the projector (Activity 4): explain: a house of glass that keeps the heat of the sun.</a:t>
-            </a:r>
-            <a:endParaRPr lang="en-US" sz="2000" dirty="0"/>
+              <a:t>Photo, Activity 3: “Forest Fires in Greece” by Lotus R, CC BY-SA 2.0, via Flickr (https://www.flickr.com/photos/66012345@N00/964251167)</a:t>
+            </a:r>
+            <a:endParaRPr lang="en-US" sz="1800" dirty="0"/>
           </a:p>
           <a:p>
             <a:pPr algn="l" marL="342900" indent="-342900">
@@ -20174,7 +21541,7 @@
               <a:buChar char="•"/>
             </a:pPr>
             <a:r>
-              <a:rPr lang="en-US" sz="2000" dirty="0">
+              <a:rPr lang="en-US" sz="1800" dirty="0">
                 <a:solidFill>
                   <a:srgbClr val="111111"/>
                 </a:solidFill>
@@ -20182,9 +21549,51 @@
                 <a:ea typeface="Calibri" pitchFamily="34" charset="-122"/>
                 <a:cs typeface="Calibri" pitchFamily="34" charset="-120"/>
               </a:rPr>
-              <a:t>Without the projector (Activity 5): compare with trees planted against the Harmattan.</a:t>
-            </a:r>
-            <a:endParaRPr lang="en-US" sz="2000" dirty="0"/>
+              <a:t>Photo, Activity 4: “Inside the Greenhouse” by USAID_IMAGES, CC BY-NC-ND 2.0, via Flickr (https://www.flickr.com/photos/46658241@N06/15000160655)</a:t>
+            </a:r>
+            <a:endParaRPr lang="en-US" sz="1800" dirty="0"/>
+          </a:p>
+          <a:p>
+            <a:pPr algn="l" marL="342900" indent="-342900">
+              <a:spcAft>
+                <a:spcPts val="800"/>
+              </a:spcAft>
+              <a:buSzPct val="100000"/>
+              <a:buChar char="•"/>
+            </a:pPr>
+            <a:r>
+              <a:rPr lang="en-US" sz="1800" dirty="0">
+                <a:solidFill>
+                  <a:srgbClr val="111111"/>
+                </a:solidFill>
+                <a:latin typeface="Calibri" pitchFamily="34" charset="0"/>
+                <a:ea typeface="Calibri" pitchFamily="34" charset="-122"/>
+                <a:cs typeface="Calibri" pitchFamily="34" charset="-120"/>
+              </a:rPr>
+              <a:t>Photo, Activity 5: “20210723-NRCS-LSC-0128” by USDAgov, Public domain 1.0, via Flickr (https://www.flickr.com/photos/41284017@N08/51526578960)</a:t>
+            </a:r>
+            <a:endParaRPr lang="en-US" sz="1800" dirty="0"/>
+          </a:p>
+          <a:p>
+            <a:pPr algn="l" marL="342900" indent="-342900">
+              <a:spcAft>
+                <a:spcPts val="800"/>
+              </a:spcAft>
+              <a:buSzPct val="100000"/>
+              <a:buChar char="•"/>
+            </a:pPr>
+            <a:r>
+              <a:rPr lang="en-US" sz="1800" dirty="0">
+                <a:solidFill>
+                  <a:srgbClr val="111111"/>
+                </a:solidFill>
+                <a:latin typeface="Calibri" pitchFamily="34" charset="0"/>
+                <a:ea typeface="Calibri" pitchFamily="34" charset="-122"/>
+                <a:cs typeface="Calibri" pitchFamily="34" charset="-120"/>
+              </a:rPr>
+              <a:t>Diagrams and animations: drawn for this lesson (Geography Department).</a:t>
+            </a:r>
+            <a:endParaRPr lang="en-US" sz="1800" dirty="0"/>
           </a:p>
         </p:txBody>
       </p:sp>
@@ -20230,374 +21639,7 @@
             <a:pPr algn="ctr"/>
             <a:fld id="{F7021451-1387-4CA6-816F-3879F97B5CBC}" type="slidenum">
               <a:rPr b="1" lang="en-US"/>
-              <a:t>50</a:t>
-            </a:fld>
-            <a:endParaRPr lang="en-US"/>
-          </a:p>
-        </p:txBody>
-      </p:sp>
-    </p:spTree>
-  </p:cSld>
-  <p:clrMapOvr>
-    <a:masterClrMapping/>
-  </p:clrMapOvr>
-</p:sld>
-</file>
-
-<file path=ppt/slides/slide51.xml><?xml version="1.0" encoding="utf-8"?>
-<p:sld xmlns:a="http://schemas.openxmlformats.org/drawingml/2006/main" xmlns:r="http://schemas.openxmlformats.org/officeDocument/2006/relationships" xmlns:p="http://schemas.openxmlformats.org/presentationml/2006/main">
-  <p:cSld name="Slide 51">
-    <p:spTree>
-      <p:nvGrpSpPr>
-        <p:cNvPr id="1" name=""/>
-        <p:cNvGrpSpPr/>
-        <p:nvPr/>
-      </p:nvGrpSpPr>
-      <p:grpSpPr>
-        <a:xfrm>
-          <a:off x="0" y="0"/>
-          <a:ext cx="0" cy="0"/>
-          <a:chOff x="0" y="0"/>
-          <a:chExt cx="0" cy="0"/>
-        </a:xfrm>
-      </p:grpSpPr>
-      <p:sp>
-        <p:nvSpPr>
-          <p:cNvPr id="2" name="Text 0"/>
-          <p:cNvSpPr/>
-          <p:nvPr/>
-        </p:nvSpPr>
-        <p:spPr>
-          <a:xfrm>
-            <a:off x="457200" y="713232"/>
-            <a:ext cx="11368735" cy="274320"/>
-          </a:xfrm>
-          <a:prstGeom prst="rect">
-            <a:avLst/>
-          </a:prstGeom>
-          <a:noFill/>
-          <a:ln/>
-        </p:spPr>
-        <p:txBody>
-          <a:bodyPr wrap="square" lIns="0" tIns="0" rIns="0" bIns="0" rtlCol="0" anchor="ctr"/>
-          <a:lstStyle/>
-          <a:p>
-            <a:pPr algn="r" indent="0" marL="0">
-              <a:buNone/>
-            </a:pPr>
-            <a:r>
-              <a:rPr lang="en-US" sz="1400" b="1" dirty="0">
-                <a:solidFill>
-                  <a:srgbClr val="1C3F6E"/>
-                </a:solidFill>
-                <a:latin typeface="Calibri" pitchFamily="34" charset="0"/>
-                <a:ea typeface="Calibri" pitchFamily="34" charset="-122"/>
-                <a:cs typeface="Calibri" pitchFamily="34" charset="-120"/>
-              </a:rPr>
-              <a:t>REFERENCES</a:t>
-            </a:r>
-            <a:endParaRPr lang="en-US" sz="1400" dirty="0"/>
-          </a:p>
-        </p:txBody>
-      </p:sp>
-      <p:pic>
-        <p:nvPicPr>
-          <p:cNvPr id="3" name="Image 0" descr="/home/claude/f4/img/minesec_sheet.png">    </p:cNvPr>
-          <p:cNvPicPr>
-            <a:picLocks noChangeAspect="1"/>
-          </p:cNvPicPr>
-          <p:nvPr/>
-        </p:nvPicPr>
-        <p:blipFill>
-          <a:blip r:embed="rId1"/>
-          <a:stretch>
-            <a:fillRect/>
-          </a:stretch>
-        </p:blipFill>
-        <p:spPr>
-          <a:xfrm>
-            <a:off x="0" y="658368"/>
-            <a:ext cx="2468880" cy="5833872"/>
-          </a:xfrm>
-          <a:prstGeom prst="rect">
-            <a:avLst/>
-          </a:prstGeom>
-        </p:spPr>
-      </p:pic>
-      <p:sp>
-        <p:nvSpPr>
-          <p:cNvPr id="4" name="Text 1"/>
-          <p:cNvSpPr/>
-          <p:nvPr/>
-        </p:nvSpPr>
-        <p:spPr>
-          <a:xfrm>
-            <a:off x="2697480" y="1005840"/>
-            <a:ext cx="9174175" cy="731520"/>
-          </a:xfrm>
-          <a:prstGeom prst="rect">
-            <a:avLst/>
-          </a:prstGeom>
-          <a:noFill/>
-          <a:ln/>
-        </p:spPr>
-        <p:txBody>
-          <a:bodyPr wrap="square" lIns="0" tIns="0" rIns="0" bIns="0" rtlCol="0" anchor="ctr">
-            <a:normAutofit/>
-          </a:bodyPr>
-          <a:lstStyle/>
-          <a:p>
-            <a:pPr algn="ctr" indent="0" marL="0">
-              <a:buNone/>
-            </a:pPr>
-            <a:r>
-              <a:rPr lang="en-US" sz="3600" b="1" dirty="0">
-                <a:solidFill>
-                  <a:srgbClr val="990011"/>
-                </a:solidFill>
-                <a:latin typeface="Times New Roman" pitchFamily="34" charset="0"/>
-                <a:ea typeface="Times New Roman" pitchFamily="34" charset="-122"/>
-                <a:cs typeface="Times New Roman" pitchFamily="34" charset="-120"/>
-              </a:rPr>
-              <a:t>References</a:t>
-            </a:r>
-            <a:endParaRPr lang="en-US" sz="3600" dirty="0"/>
-          </a:p>
-        </p:txBody>
-      </p:sp>
-      <p:sp>
-        <p:nvSpPr>
-          <p:cNvPr id="5" name="Text 2"/>
-          <p:cNvSpPr/>
-          <p:nvPr/>
-        </p:nvSpPr>
-        <p:spPr>
-          <a:xfrm>
-            <a:off x="2697480" y="1783080"/>
-            <a:ext cx="9174175" cy="4663440"/>
-          </a:xfrm>
-          <a:prstGeom prst="rect">
-            <a:avLst/>
-          </a:prstGeom>
-          <a:noFill/>
-          <a:ln/>
-        </p:spPr>
-        <p:txBody>
-          <a:bodyPr wrap="square" lIns="0" tIns="0" rIns="0" bIns="0" rtlCol="0" anchor="t"/>
-          <a:lstStyle/>
-          <a:p>
-            <a:pPr algn="l" marL="342900" indent="-342900">
-              <a:spcAft>
-                <a:spcPts val="800"/>
-              </a:spcAft>
-              <a:buSzPct val="100000"/>
-              <a:buChar char="•"/>
-            </a:pPr>
-            <a:r>
-              <a:rPr lang="en-US" sz="1800" dirty="0">
-                <a:solidFill>
-                  <a:srgbClr val="111111"/>
-                </a:solidFill>
-                <a:latin typeface="Calibri" pitchFamily="34" charset="0"/>
-                <a:ea typeface="Calibri" pitchFamily="34" charset="-122"/>
-                <a:cs typeface="Calibri" pitchFamily="34" charset="-120"/>
-              </a:rPr>
-              <a:t>Harmonised Progression Sheet, Economic Geography (5051), Form 2.</a:t>
-            </a:r>
-            <a:endParaRPr lang="en-US" sz="1800" dirty="0"/>
-          </a:p>
-          <a:p>
-            <a:pPr algn="l" marL="342900" indent="-342900">
-              <a:spcAft>
-                <a:spcPts val="800"/>
-              </a:spcAft>
-              <a:buSzPct val="100000"/>
-              <a:buChar char="•"/>
-            </a:pPr>
-            <a:r>
-              <a:rPr lang="en-US" sz="1800" dirty="0">
-                <a:solidFill>
-                  <a:srgbClr val="111111"/>
-                </a:solidFill>
-                <a:latin typeface="Calibri" pitchFamily="34" charset="0"/>
-                <a:ea typeface="Calibri" pitchFamily="34" charset="-122"/>
-                <a:cs typeface="Calibri" pitchFamily="34" charset="-120"/>
-              </a:rPr>
-              <a:t>Class textbook: The major biomes of the world (temperate regions).</a:t>
-            </a:r>
-            <a:endParaRPr lang="en-US" sz="1800" dirty="0"/>
-          </a:p>
-          <a:p>
-            <a:pPr algn="l" marL="342900" indent="-342900">
-              <a:spcAft>
-                <a:spcPts val="800"/>
-              </a:spcAft>
-              <a:buSzPct val="100000"/>
-              <a:buChar char="•"/>
-            </a:pPr>
-            <a:r>
-              <a:rPr lang="en-US" sz="1800" dirty="0">
-                <a:solidFill>
-                  <a:srgbClr val="111111"/>
-                </a:solidFill>
-                <a:latin typeface="Calibri" pitchFamily="34" charset="0"/>
-                <a:ea typeface="Calibri" pitchFamily="34" charset="-122"/>
-                <a:cs typeface="Calibri" pitchFamily="34" charset="-120"/>
-              </a:rPr>
-              <a:t>Photo, Activity 1: “First Snowplow of the Season” by JLS Photography - Alaska, CC BY-NC-ND 2.0, via Flickr (https://www.flickr.com/photos/50830796@N04/37613240186)</a:t>
-            </a:r>
-            <a:endParaRPr lang="en-US" sz="1800" dirty="0"/>
-          </a:p>
-          <a:p>
-            <a:pPr algn="l" marL="342900" indent="-342900">
-              <a:spcAft>
-                <a:spcPts val="800"/>
-              </a:spcAft>
-              <a:buSzPct val="100000"/>
-              <a:buChar char="•"/>
-            </a:pPr>
-            <a:r>
-              <a:rPr lang="en-US" sz="1800" dirty="0">
-                <a:solidFill>
-                  <a:srgbClr val="111111"/>
-                </a:solidFill>
-                <a:latin typeface="Calibri" pitchFamily="34" charset="0"/>
-                <a:ea typeface="Calibri" pitchFamily="34" charset="-122"/>
-                <a:cs typeface="Calibri" pitchFamily="34" charset="-120"/>
-              </a:rPr>
-              <a:t>Photo, Activity 2: “Dust Bowl 1935” by MyEyeSees, CC BY-NC-ND 2.0, via Flickr (https://www.flickr.com/photos/57884042@N00/3182214903)</a:t>
-            </a:r>
-            <a:endParaRPr lang="en-US" sz="1800" dirty="0"/>
-          </a:p>
-          <a:p>
-            <a:pPr algn="l" marL="342900" indent="-342900">
-              <a:spcAft>
-                <a:spcPts val="800"/>
-              </a:spcAft>
-              <a:buSzPct val="100000"/>
-              <a:buChar char="•"/>
-            </a:pPr>
-            <a:r>
-              <a:rPr lang="en-US" sz="1800" dirty="0">
-                <a:solidFill>
-                  <a:srgbClr val="111111"/>
-                </a:solidFill>
-                <a:latin typeface="Calibri" pitchFamily="34" charset="0"/>
-                <a:ea typeface="Calibri" pitchFamily="34" charset="-122"/>
-                <a:cs typeface="Calibri" pitchFamily="34" charset="-120"/>
-              </a:rPr>
-              <a:t>Photo, Activity 3: “Forest Fires in Greece” by Lotus R, CC BY-SA 2.0, via Flickr (https://www.flickr.com/photos/66012345@N00/964251167)</a:t>
-            </a:r>
-            <a:endParaRPr lang="en-US" sz="1800" dirty="0"/>
-          </a:p>
-          <a:p>
-            <a:pPr algn="l" marL="342900" indent="-342900">
-              <a:spcAft>
-                <a:spcPts val="800"/>
-              </a:spcAft>
-              <a:buSzPct val="100000"/>
-              <a:buChar char="•"/>
-            </a:pPr>
-            <a:r>
-              <a:rPr lang="en-US" sz="1800" dirty="0">
-                <a:solidFill>
-                  <a:srgbClr val="111111"/>
-                </a:solidFill>
-                <a:latin typeface="Calibri" pitchFamily="34" charset="0"/>
-                <a:ea typeface="Calibri" pitchFamily="34" charset="-122"/>
-                <a:cs typeface="Calibri" pitchFamily="34" charset="-120"/>
-              </a:rPr>
-              <a:t>Photo, Activity 4: “Inside the Greenhouse” by USAID_IMAGES, CC BY-NC-ND 2.0, via Flickr (https://www.flickr.com/photos/46658241@N06/15000160655)</a:t>
-            </a:r>
-            <a:endParaRPr lang="en-US" sz="1800" dirty="0"/>
-          </a:p>
-          <a:p>
-            <a:pPr algn="l" marL="342900" indent="-342900">
-              <a:spcAft>
-                <a:spcPts val="800"/>
-              </a:spcAft>
-              <a:buSzPct val="100000"/>
-              <a:buChar char="•"/>
-            </a:pPr>
-            <a:r>
-              <a:rPr lang="en-US" sz="1800" dirty="0">
-                <a:solidFill>
-                  <a:srgbClr val="111111"/>
-                </a:solidFill>
-                <a:latin typeface="Calibri" pitchFamily="34" charset="0"/>
-                <a:ea typeface="Calibri" pitchFamily="34" charset="-122"/>
-                <a:cs typeface="Calibri" pitchFamily="34" charset="-120"/>
-              </a:rPr>
-              <a:t>Photo, Activity 5: “20210723-NRCS-LSC-0128” by USDAgov, Public domain 1.0, via Flickr (https://www.flickr.com/photos/41284017@N08/51526578960)</a:t>
-            </a:r>
-            <a:endParaRPr lang="en-US" sz="1800" dirty="0"/>
-          </a:p>
-          <a:p>
-            <a:pPr algn="l" marL="342900" indent="-342900">
-              <a:spcAft>
-                <a:spcPts val="800"/>
-              </a:spcAft>
-              <a:buSzPct val="100000"/>
-              <a:buChar char="•"/>
-            </a:pPr>
-            <a:r>
-              <a:rPr lang="en-US" sz="1800" dirty="0">
-                <a:solidFill>
-                  <a:srgbClr val="111111"/>
-                </a:solidFill>
-                <a:latin typeface="Calibri" pitchFamily="34" charset="0"/>
-                <a:ea typeface="Calibri" pitchFamily="34" charset="-122"/>
-                <a:cs typeface="Calibri" pitchFamily="34" charset="-120"/>
-              </a:rPr>
-              <a:t>Diagrams and animations: drawn for this lesson (Geography Department).</a:t>
-            </a:r>
-            <a:endParaRPr lang="en-US" sz="1800" dirty="0"/>
-          </a:p>
-        </p:txBody>
-      </p:sp>
-      <p:sp>
-        <p:nvSpPr>
-          <p:cNvPr id="25" name="Slide Number Placeholder 0"/>
-          <p:cNvSpPr>
-            <a:spLocks noGrp="1"/>
-          </p:cNvSpPr>
-          <p:nvPr>
-            <p:ph type="sldNum" sz="quarter" idx="4294967295"/>
-          </p:nvPr>
-        </p:nvSpPr>
-        <p:spPr>
-          <a:xfrm>
-            <a:off x="27432" y="91440"/>
-            <a:ext cx="585216" cy="475488"/>
-          </a:xfrm>
-          <a:prstGeom prst="rect">
-            <a:avLst/>
-          </a:prstGeom>
-          <a:extLst>
-            <a:ext uri="{C572A759-6A51-4108-AA02-DFA0A04FC94B}">
-              <ma14:wrappingTextBoxFlag xmlns:ma14="http://schemas.microsoft.com/office/mac/drawingml/2011/main" val="0"/>
-            </a:ext>
-          </a:extLst>
-        </p:spPr>
-        <p:txBody>
-          <a:bodyPr/>
-          <a:lstStyle>
-            <a:lvl1pPr>
-              <a:defRPr sz="2000">
-                <a:solidFill>
-                  <a:srgbClr val="FFFFFF"/>
-                </a:solidFill>
-                <a:latin typeface="Calibri"/>
-                <a:ea typeface="Calibri"/>
-                <a:cs typeface="Calibri"/>
-              </a:defRPr>
-            </a:lvl1pPr>
-          </a:lstStyle>
-          <a:p>
-            <a:pPr algn="ctr"/>
-            <a:fld id="{F7021451-1387-4CA6-816F-3879F97B5CBC}" type="slidenum">
-              <a:rPr b="1" lang="en-US"/>
-              <a:t>51</a:t>
+              <a:t>54</a:t>
             </a:fld>
             <a:endParaRPr lang="en-US"/>
           </a:p>

--- a/lecons/F2T/19_S13_L4_P4_Temperate_Problems_Adaptations.pptx
+++ b/lecons/F2T/19_S13_L4_P4_Temperate_Problems_Adaptations.pptx
@@ -3459,7 +3459,7 @@
           <a:p>
             <a:r>
               <a:rPr lang="en-US" dirty="0"/>
-              <a:t>Before we start the new lesson, let us correct the homework I gave you at the end of Lesson 4 (Part 3): The Temperate Region: Human Activities (Farming). The question was: Ask an adult who has lived or travelled in Europe what difficulties people face in winter. Write down two of them. Take out your exercise books.</a:t>
+              <a:t>Before we start the new lesson, let us correct the homework I gave you at the end of Lesson 4 (Part 3): The Temperate Region: Human Activities (Farming). The question was: Give two problems of the temperate region. Take out your exercise books.</a:t>
             </a:r>
             <a:endParaRPr lang="en-US" dirty="0"/>
           </a:p>
@@ -4251,7 +4251,7 @@
           <a:p>
             <a:r>
               <a:rPr lang="en-US" dirty="0"/>
-              <a:t>For your homework: List five jobs done by people in your family or neighbourhood (for example farmer, trader, teacher, mechanic, tailor). We shall correct it at the beginning of our next lesson.</a:t>
+              <a:t>For your homework: Name the four sectors of the economy. We shall correct it at the beginning of our next lesson.</a:t>
             </a:r>
             <a:endParaRPr lang="en-US" dirty="0"/>
           </a:p>
@@ -4427,7 +4427,7 @@
           <a:p>
             <a:r>
               <a:rPr lang="en-US" dirty="0"/>
-              <a:t>Here is a good answer. Examples: snow and ice block roads and cause accidents; it is very cold, so people must pay for heating; days are short and dark; water pipes can freeze. Compare it with your own answer and correct your work in red.</a:t>
+              <a:t>Here is a good answer. Cold winters with snow and wind erosion of soils. Compare it with your own answer and correct your work in red.</a:t>
             </a:r>
             <a:endParaRPr lang="en-US" dirty="0"/>
           </a:p>
@@ -15138,7 +15138,7 @@
         <p:spPr>
           <a:xfrm>
             <a:off x="0" y="658368"/>
-            <a:ext cx="3840480" cy="5833872"/>
+            <a:ext cx="5120640" cy="5833872"/>
           </a:xfrm>
           <a:prstGeom prst="rect">
             <a:avLst/>
@@ -15153,8 +15153,8 @@
         </p:nvSpPr>
         <p:spPr>
           <a:xfrm>
-            <a:off x="4069080" y="1005840"/>
-            <a:ext cx="7802575" cy="731520"/>
+            <a:off x="5349240" y="1005840"/>
+            <a:ext cx="6522415" cy="731520"/>
           </a:xfrm>
           <a:prstGeom prst="rect">
             <a:avLst/>
@@ -15194,8 +15194,8 @@
         </p:nvSpPr>
         <p:spPr>
           <a:xfrm>
-            <a:off x="4069080" y="1783080"/>
-            <a:ext cx="7802575" cy="4663440"/>
+            <a:off x="5349240" y="1783080"/>
+            <a:ext cx="6522415" cy="4663440"/>
           </a:xfrm>
           <a:prstGeom prst="rect">
             <a:avLst/>
@@ -15242,7 +15242,7 @@
                 <a:ea typeface="Times New Roman" pitchFamily="34" charset="-122"/>
                 <a:cs typeface="Times New Roman" pitchFamily="34" charset="-120"/>
               </a:rPr>
-              <a:t>Ask an adult who has lived or travelled in Europe what difficulties people face in winter. Write down two of them.</a:t>
+              <a:t>Give two problems of the temperate region.</a:t>
             </a:r>
             <a:endParaRPr lang="en-US" sz="4000" dirty="0"/>
           </a:p>
@@ -17414,7 +17414,7 @@
                 <a:ea typeface="Times New Roman" pitchFamily="34" charset="-122"/>
                 <a:cs typeface="Times New Roman" pitchFamily="34" charset="-120"/>
               </a:rPr>
-              <a:t>List five jobs done by people in your family or neighbourhood (for example farmer, trader, teacher, mechanic, tailor).</a:t>
+              <a:t>Name the four sectors of the economy.</a:t>
             </a:r>
             <a:endParaRPr lang="en-US" sz="4000" dirty="0"/>
           </a:p>
@@ -17872,7 +17872,7 @@
                 <a:ea typeface="Times New Roman" pitchFamily="34" charset="-122"/>
                 <a:cs typeface="Times New Roman" pitchFamily="34" charset="-120"/>
               </a:rPr>
-              <a:t>Examples: snow and ice block roads and cause accidents; it is very cold, so people must pay for heating; days are short and dark; water pipes can freeze.</a:t>
+              <a:t>Cold winters with snow and wind erosion of soils.</a:t>
             </a:r>
             <a:endParaRPr lang="en-US" sz="4000" dirty="0"/>
           </a:p>
@@ -20573,7 +20573,7 @@
                           <a:ea typeface="Calibri" pitchFamily="34" charset="-122"/>
                           <a:cs typeface="Calibri" pitchFamily="34" charset="-120"/>
                         </a:rPr>
-                        <a:t>List five jobs done by people in your family or neighbourhood (for example farmer, trader, teacher, mechanic, tailor).</a:t>
+                        <a:t>Name the four sectors of the economy.</a:t>
                       </a:r>
                       <a:endParaRPr lang="en-US" sz="1600" dirty="0">
                         <a:latin typeface="Calibri" charset="0"/>
